--- a/Slides/Week01/00：課程大綱.pptx
+++ b/Slides/Week01/00：課程大綱.pptx
@@ -5,10 +5,10 @@
     <p:sldMasterId id="2147483648" r:id="rId1"/>
   </p:sldMasterIdLst>
   <p:notesMasterIdLst>
-    <p:notesMasterId r:id="rId23"/>
+    <p:notesMasterId r:id="rId22"/>
   </p:notesMasterIdLst>
   <p:handoutMasterIdLst>
-    <p:handoutMasterId r:id="rId24"/>
+    <p:handoutMasterId r:id="rId23"/>
   </p:handoutMasterIdLst>
   <p:sldIdLst>
     <p:sldId id="681" r:id="rId2"/>
@@ -21,17 +21,16 @@
     <p:sldId id="1186" r:id="rId9"/>
     <p:sldId id="1187" r:id="rId10"/>
     <p:sldId id="1188" r:id="rId11"/>
-    <p:sldId id="1189" r:id="rId12"/>
-    <p:sldId id="1190" r:id="rId13"/>
-    <p:sldId id="1191" r:id="rId14"/>
-    <p:sldId id="1192" r:id="rId15"/>
-    <p:sldId id="1193" r:id="rId16"/>
-    <p:sldId id="786" r:id="rId17"/>
-    <p:sldId id="1194" r:id="rId18"/>
-    <p:sldId id="1195" r:id="rId19"/>
-    <p:sldId id="1196" r:id="rId20"/>
-    <p:sldId id="1197" r:id="rId21"/>
-    <p:sldId id="1198" r:id="rId22"/>
+    <p:sldId id="1190" r:id="rId12"/>
+    <p:sldId id="1191" r:id="rId13"/>
+    <p:sldId id="1192" r:id="rId14"/>
+    <p:sldId id="1193" r:id="rId15"/>
+    <p:sldId id="786" r:id="rId16"/>
+    <p:sldId id="1194" r:id="rId17"/>
+    <p:sldId id="1195" r:id="rId18"/>
+    <p:sldId id="1196" r:id="rId19"/>
+    <p:sldId id="1197" r:id="rId20"/>
+    <p:sldId id="1198" r:id="rId21"/>
   </p:sldIdLst>
   <p:sldSz cx="9144000" cy="6858000" type="screen4x3"/>
   <p:notesSz cx="6858000" cy="9144000"/>
@@ -246,7 +245,7 @@
             <a:fld id="{68F88C59-319B-4332-9A1D-2A62CFCB00D8}" type="datetimeFigureOut">
               <a:rPr lang="en-US" smtClean="0"/>
               <a:pPr/>
-              <a:t>3/21/2024</a:t>
+              <a:t>11/13/2024</a:t>
             </a:fld>
             <a:endParaRPr lang="en-US" dirty="0"/>
           </a:p>
@@ -417,7 +416,7 @@
             <a:fld id="{968B300D-05F0-4B43-940D-46DED5A791AD}" type="datetimeFigureOut">
               <a:rPr lang="en-US" smtClean="0"/>
               <a:pPr/>
-              <a:t>3/21/2024</a:t>
+              <a:t>11/13/2024</a:t>
             </a:fld>
             <a:endParaRPr lang="en-US" dirty="0"/>
           </a:p>
@@ -937,7 +936,7 @@
     </p:spTree>
     <p:extLst>
       <p:ext uri="{BB962C8B-B14F-4D97-AF65-F5344CB8AC3E}">
-        <p14:creationId xmlns:p14="http://schemas.microsoft.com/office/powerpoint/2010/main" val="3356439683"/>
+        <p14:creationId xmlns:p14="http://schemas.microsoft.com/office/powerpoint/2010/main" val="2019447142"/>
       </p:ext>
     </p:extLst>
   </p:cSld>
@@ -1022,7 +1021,7 @@
     </p:spTree>
     <p:extLst>
       <p:ext uri="{BB962C8B-B14F-4D97-AF65-F5344CB8AC3E}">
-        <p14:creationId xmlns:p14="http://schemas.microsoft.com/office/powerpoint/2010/main" val="2019447142"/>
+        <p14:creationId xmlns:p14="http://schemas.microsoft.com/office/powerpoint/2010/main" val="4275020599"/>
       </p:ext>
     </p:extLst>
   </p:cSld>
@@ -1107,7 +1106,7 @@
     </p:spTree>
     <p:extLst>
       <p:ext uri="{BB962C8B-B14F-4D97-AF65-F5344CB8AC3E}">
-        <p14:creationId xmlns:p14="http://schemas.microsoft.com/office/powerpoint/2010/main" val="4275020599"/>
+        <p14:creationId xmlns:p14="http://schemas.microsoft.com/office/powerpoint/2010/main" val="1924964501"/>
       </p:ext>
     </p:extLst>
   </p:cSld>
@@ -1192,7 +1191,7 @@
     </p:spTree>
     <p:extLst>
       <p:ext uri="{BB962C8B-B14F-4D97-AF65-F5344CB8AC3E}">
-        <p14:creationId xmlns:p14="http://schemas.microsoft.com/office/powerpoint/2010/main" val="1924964501"/>
+        <p14:creationId xmlns:p14="http://schemas.microsoft.com/office/powerpoint/2010/main" val="2106514724"/>
       </p:ext>
     </p:extLst>
   </p:cSld>
@@ -1277,7 +1276,7 @@
     </p:spTree>
     <p:extLst>
       <p:ext uri="{BB962C8B-B14F-4D97-AF65-F5344CB8AC3E}">
-        <p14:creationId xmlns:p14="http://schemas.microsoft.com/office/powerpoint/2010/main" val="2106514724"/>
+        <p14:creationId xmlns:p14="http://schemas.microsoft.com/office/powerpoint/2010/main" val="925638929"/>
       </p:ext>
     </p:extLst>
   </p:cSld>
@@ -1362,7 +1361,7 @@
     </p:spTree>
     <p:extLst>
       <p:ext uri="{BB962C8B-B14F-4D97-AF65-F5344CB8AC3E}">
-        <p14:creationId xmlns:p14="http://schemas.microsoft.com/office/powerpoint/2010/main" val="925638929"/>
+        <p14:creationId xmlns:p14="http://schemas.microsoft.com/office/powerpoint/2010/main" val="2220182473"/>
       </p:ext>
     </p:extLst>
   </p:cSld>
@@ -1447,7 +1446,7 @@
     </p:spTree>
     <p:extLst>
       <p:ext uri="{BB962C8B-B14F-4D97-AF65-F5344CB8AC3E}">
-        <p14:creationId xmlns:p14="http://schemas.microsoft.com/office/powerpoint/2010/main" val="2220182473"/>
+        <p14:creationId xmlns:p14="http://schemas.microsoft.com/office/powerpoint/2010/main" val="1929445727"/>
       </p:ext>
     </p:extLst>
   </p:cSld>
@@ -1532,7 +1531,7 @@
     </p:spTree>
     <p:extLst>
       <p:ext uri="{BB962C8B-B14F-4D97-AF65-F5344CB8AC3E}">
-        <p14:creationId xmlns:p14="http://schemas.microsoft.com/office/powerpoint/2010/main" val="1929445727"/>
+        <p14:creationId xmlns:p14="http://schemas.microsoft.com/office/powerpoint/2010/main" val="473436335"/>
       </p:ext>
     </p:extLst>
   </p:cSld>
@@ -1617,7 +1616,7 @@
     </p:spTree>
     <p:extLst>
       <p:ext uri="{BB962C8B-B14F-4D97-AF65-F5344CB8AC3E}">
-        <p14:creationId xmlns:p14="http://schemas.microsoft.com/office/powerpoint/2010/main" val="473436335"/>
+        <p14:creationId xmlns:p14="http://schemas.microsoft.com/office/powerpoint/2010/main" val="346364332"/>
       </p:ext>
     </p:extLst>
   </p:cSld>
@@ -1779,91 +1778,6 @@
               <a:rPr lang="en-US" smtClean="0"/>
               <a:pPr/>
               <a:t>20</a:t>
-            </a:fld>
-            <a:endParaRPr lang="en-US" dirty="0"/>
-          </a:p>
-        </p:txBody>
-      </p:sp>
-    </p:spTree>
-    <p:extLst>
-      <p:ext uri="{BB962C8B-B14F-4D97-AF65-F5344CB8AC3E}">
-        <p14:creationId xmlns:p14="http://schemas.microsoft.com/office/powerpoint/2010/main" val="346364332"/>
-      </p:ext>
-    </p:extLst>
-  </p:cSld>
-  <p:clrMapOvr>
-    <a:masterClrMapping/>
-  </p:clrMapOvr>
-</p:notes>
-</file>
-
-<file path=ppt/notesSlides/notesSlide21.xml><?xml version="1.0" encoding="utf-8"?>
-<p:notes xmlns:a="http://schemas.openxmlformats.org/drawingml/2006/main" xmlns:r="http://schemas.openxmlformats.org/officeDocument/2006/relationships" xmlns:p="http://schemas.openxmlformats.org/presentationml/2006/main">
-  <p:cSld>
-    <p:spTree>
-      <p:nvGrpSpPr>
-        <p:cNvPr id="1" name=""/>
-        <p:cNvGrpSpPr/>
-        <p:nvPr/>
-      </p:nvGrpSpPr>
-      <p:grpSpPr>
-        <a:xfrm>
-          <a:off x="0" y="0"/>
-          <a:ext cx="0" cy="0"/>
-          <a:chOff x="0" y="0"/>
-          <a:chExt cx="0" cy="0"/>
-        </a:xfrm>
-      </p:grpSpPr>
-      <p:sp>
-        <p:nvSpPr>
-          <p:cNvPr id="2" name="投影片圖像版面配置區 1"/>
-          <p:cNvSpPr>
-            <a:spLocks noGrp="1" noRot="1" noChangeAspect="1"/>
-          </p:cNvSpPr>
-          <p:nvPr>
-            <p:ph type="sldImg"/>
-          </p:nvPr>
-        </p:nvSpPr>
-        <p:spPr/>
-      </p:sp>
-      <p:sp>
-        <p:nvSpPr>
-          <p:cNvPr id="3" name="備忘稿版面配置區 2"/>
-          <p:cNvSpPr>
-            <a:spLocks noGrp="1"/>
-          </p:cNvSpPr>
-          <p:nvPr>
-            <p:ph type="body" idx="1"/>
-          </p:nvPr>
-        </p:nvSpPr>
-        <p:spPr/>
-        <p:txBody>
-          <a:bodyPr/>
-          <a:lstStyle/>
-          <a:p>
-            <a:endParaRPr lang="zh-TW" altLang="en-US" dirty="0"/>
-          </a:p>
-        </p:txBody>
-      </p:sp>
-      <p:sp>
-        <p:nvSpPr>
-          <p:cNvPr id="4" name="投影片編號版面配置區 3"/>
-          <p:cNvSpPr>
-            <a:spLocks noGrp="1"/>
-          </p:cNvSpPr>
-          <p:nvPr>
-            <p:ph type="sldNum" sz="quarter" idx="10"/>
-          </p:nvPr>
-        </p:nvSpPr>
-        <p:spPr/>
-        <p:txBody>
-          <a:bodyPr/>
-          <a:lstStyle/>
-          <a:p>
-            <a:fld id="{9B26CD33-4337-4529-948A-94F6960B2374}" type="slidenum">
-              <a:rPr lang="en-US" smtClean="0"/>
-              <a:pPr/>
-              <a:t>21</a:t>
             </a:fld>
             <a:endParaRPr lang="en-US" dirty="0"/>
           </a:p>
@@ -2785,7 +2699,7 @@
                 </a:solidFill>
               </a:rPr>
               <a:pPr/>
-              <a:t>3/21/2024</a:t>
+              <a:t>11/13/2024</a:t>
             </a:fld>
             <a:endParaRPr kumimoji="0" lang="en-US" dirty="0"/>
           </a:p>
@@ -3176,7 +3090,7 @@
                 </a:solidFill>
               </a:rPr>
               <a:pPr/>
-              <a:t>3/21/2024</a:t>
+              <a:t>11/13/2024</a:t>
             </a:fld>
             <a:endParaRPr kumimoji="0" lang="en-US" dirty="0"/>
           </a:p>
@@ -3511,7 +3425,7 @@
                 </a:solidFill>
               </a:rPr>
               <a:pPr/>
-              <a:t>3/21/2024</a:t>
+              <a:t>11/13/2024</a:t>
             </a:fld>
             <a:endParaRPr kumimoji="0" lang="en-US" dirty="0"/>
           </a:p>
@@ -4087,7 +4001,7 @@
                 </a:solidFill>
               </a:rPr>
               <a:pPr/>
-              <a:t>3/21/2024</a:t>
+              <a:t>11/13/2024</a:t>
             </a:fld>
             <a:endParaRPr kumimoji="0" lang="en-US" dirty="0"/>
           </a:p>
@@ -4651,7 +4565,7 @@
                 </a:solidFill>
               </a:rPr>
               <a:pPr/>
-              <a:t>3/21/2024</a:t>
+              <a:t>11/13/2024</a:t>
             </a:fld>
             <a:endParaRPr kumimoji="0" lang="en-US" dirty="0"/>
           </a:p>
@@ -5110,7 +5024,7 @@
                 </a:solidFill>
               </a:rPr>
               <a:pPr/>
-              <a:t>3/21/2024</a:t>
+              <a:t>11/13/2024</a:t>
             </a:fld>
             <a:endParaRPr kumimoji="0" lang="en-US" dirty="0"/>
           </a:p>
@@ -5534,7 +5448,7 @@
                 </a:solidFill>
               </a:rPr>
               <a:pPr/>
-              <a:t>3/21/2024</a:t>
+              <a:t>11/13/2024</a:t>
             </a:fld>
             <a:endParaRPr kumimoji="0" lang="en-US" dirty="0"/>
           </a:p>
@@ -6038,7 +5952,7 @@
                 </a:solidFill>
               </a:rPr>
               <a:pPr/>
-              <a:t>3/21/2024</a:t>
+              <a:t>11/13/2024</a:t>
             </a:fld>
             <a:endParaRPr kumimoji="0" lang="en-US" dirty="0"/>
           </a:p>
@@ -6542,7 +6456,7 @@
                 </a:solidFill>
               </a:rPr>
               <a:pPr/>
-              <a:t>3/21/2024</a:t>
+              <a:t>11/13/2024</a:t>
             </a:fld>
             <a:endParaRPr kumimoji="0" lang="en-US" dirty="0"/>
           </a:p>
@@ -6758,7 +6672,7 @@
                 </a:solidFill>
               </a:rPr>
               <a:pPr/>
-              <a:t>3/21/2024</a:t>
+              <a:t>11/13/2024</a:t>
             </a:fld>
             <a:endParaRPr kumimoji="0" lang="en-US" dirty="0"/>
           </a:p>
@@ -7086,7 +7000,7 @@
                 </a:solidFill>
               </a:rPr>
               <a:pPr/>
-              <a:t>3/21/2024</a:t>
+              <a:t>11/13/2024</a:t>
             </a:fld>
             <a:endParaRPr kumimoji="0" lang="en-US" dirty="0"/>
           </a:p>
@@ -7312,7 +7226,7 @@
                 </a:solidFill>
               </a:rPr>
               <a:pPr/>
-              <a:t>3/21/2024</a:t>
+              <a:t>11/13/2024</a:t>
             </a:fld>
             <a:endParaRPr kumimoji="0" lang="en-US" dirty="0"/>
           </a:p>
@@ -7531,7 +7445,7 @@
                 </a:solidFill>
               </a:rPr>
               <a:pPr/>
-              <a:t>3/21/2024</a:t>
+              <a:t>11/13/2024</a:t>
             </a:fld>
             <a:endParaRPr kumimoji="0" lang="en-US" dirty="0"/>
           </a:p>
@@ -7707,7 +7621,7 @@
             <a:fld id="{ACB2EC6F-6501-4E04-BD6C-A8A6CABB2C5B}" type="datetimeFigureOut">
               <a:rPr kumimoji="0" lang="en-US" smtClean="0"/>
               <a:pPr/>
-              <a:t>3/21/2024</a:t>
+              <a:t>11/13/2024</a:t>
             </a:fld>
             <a:endParaRPr kumimoji="0" lang="en-US" dirty="0"/>
           </a:p>
@@ -7952,7 +7866,7 @@
                 </a:solidFill>
               </a:rPr>
               <a:pPr/>
-              <a:t>3/21/2024</a:t>
+              <a:t>11/13/2024</a:t>
             </a:fld>
             <a:endParaRPr kumimoji="0" lang="en-US" dirty="0"/>
           </a:p>
@@ -8424,7 +8338,7 @@
                 </a:solidFill>
               </a:rPr>
               <a:pPr/>
-              <a:t>3/21/2024</a:t>
+              <a:t>11/13/2024</a:t>
             </a:fld>
             <a:endParaRPr kumimoji="0" lang="en-US" dirty="0"/>
           </a:p>
@@ -8776,7 +8690,7 @@
                 </a:solidFill>
               </a:rPr>
               <a:pPr/>
-              <a:t>3/21/2024</a:t>
+              <a:t>11/13/2024</a:t>
             </a:fld>
             <a:endParaRPr kumimoji="0" lang="en-US" dirty="0"/>
           </a:p>
@@ -9134,7 +9048,7 @@
                 </a:solidFill>
               </a:rPr>
               <a:pPr/>
-              <a:t>3/21/2024</a:t>
+              <a:t>11/13/2024</a:t>
             </a:fld>
             <a:endParaRPr kumimoji="0" lang="en-US" dirty="0"/>
           </a:p>
@@ -9439,7 +9353,7 @@
                 </a:solidFill>
               </a:rPr>
               <a:pPr/>
-              <a:t>3/21/2024</a:t>
+              <a:t>11/13/2024</a:t>
             </a:fld>
             <a:endParaRPr kumimoji="0" lang="en-US" dirty="0"/>
           </a:p>
@@ -9915,7 +9829,7 @@
                 </a:solidFill>
               </a:rPr>
               <a:pPr/>
-              <a:t>3/21/2024</a:t>
+              <a:t>11/13/2024</a:t>
             </a:fld>
             <a:endParaRPr kumimoji="0" lang="en-US" dirty="0"/>
           </a:p>
@@ -10152,7 +10066,7 @@
                 </a:solidFill>
               </a:rPr>
               <a:pPr/>
-              <a:t>3/21/2024</a:t>
+              <a:t>11/13/2024</a:t>
             </a:fld>
             <a:endParaRPr kumimoji="0" lang="en-US" sz="1200" dirty="0">
               <a:solidFill>
@@ -11205,7 +11119,7 @@
         <p:spPr>
           <a:xfrm>
             <a:off x="685800" y="1828800"/>
-            <a:ext cx="8077200" cy="1569660"/>
+            <a:ext cx="8077200" cy="2062103"/>
           </a:xfrm>
           <a:prstGeom prst="rect">
             <a:avLst/>
@@ -11346,6 +11260,39 @@
               <a:cs typeface="Heiti TC Light"/>
             </a:endParaRPr>
           </a:p>
+          <a:p>
+            <a:pPr marL="361950" indent="-361950">
+              <a:buFont typeface="Arial" panose="020B0604020202020204" pitchFamily="34" charset="0"/>
+              <a:buChar char="•"/>
+            </a:pPr>
+            <a:r>
+              <a:rPr kumimoji="1" lang="zh-TW" altLang="en-US" sz="3200" dirty="0">
+                <a:effectLst>
+                  <a:outerShdw blurRad="38100" dist="38100" dir="2700000" algn="tl">
+                    <a:srgbClr val="000000">
+                      <a:alpha val="43137"/>
+                    </a:srgbClr>
+                  </a:outerShdw>
+                </a:effectLst>
+                <a:latin typeface="微軟正黑體" panose="020B0604030504040204" pitchFamily="34" charset="-120"/>
+                <a:ea typeface="微軟正黑體" panose="020B0604030504040204" pitchFamily="34" charset="-120"/>
+                <a:cs typeface="Heiti TC Light"/>
+              </a:rPr>
+              <a:t>循環神經網路的問題</a:t>
+            </a:r>
+            <a:endParaRPr kumimoji="1" lang="en-US" altLang="zh-TW" sz="3200" dirty="0">
+              <a:effectLst>
+                <a:outerShdw blurRad="38100" dist="38100" dir="2700000" algn="tl">
+                  <a:srgbClr val="000000">
+                    <a:alpha val="43137"/>
+                  </a:srgbClr>
+                </a:outerShdw>
+              </a:effectLst>
+              <a:latin typeface="微軟正黑體" panose="020B0604030504040204" pitchFamily="34" charset="-120"/>
+              <a:ea typeface="微軟正黑體" panose="020B0604030504040204" pitchFamily="34" charset="-120"/>
+              <a:cs typeface="Heiti TC Light"/>
+            </a:endParaRPr>
+          </a:p>
         </p:txBody>
       </p:sp>
       <p:sp>
@@ -11358,8 +11305,8 @@
         </p:nvSpPr>
         <p:spPr>
           <a:xfrm>
-            <a:off x="1828800" y="502027"/>
-            <a:ext cx="6019800" cy="990600"/>
+            <a:off x="1295400" y="457200"/>
+            <a:ext cx="7239000" cy="990600"/>
           </a:xfrm>
           <a:prstGeom prst="rect">
             <a:avLst/>
@@ -11409,7 +11356,7 @@
                 <a:ea typeface="微軟正黑體" panose="020B0604030504040204" pitchFamily="34" charset="-120"/>
                 <a:cs typeface="+mn-cs"/>
               </a:rPr>
-              <a:t>7. Word2Vec</a:t>
+              <a:t>7. </a:t>
             </a:r>
             <a:r>
               <a:rPr kumimoji="0" lang="zh-TW" altLang="en-US" sz="4800" b="1" i="0" u="none" strike="noStrike" kern="0" cap="none" spc="0" normalizeH="0" baseline="0" noProof="0" dirty="0">
@@ -11432,7 +11379,7 @@
                 <a:ea typeface="微軟正黑體" panose="020B0604030504040204" pitchFamily="34" charset="-120"/>
                 <a:cs typeface="+mn-cs"/>
               </a:rPr>
-              <a:t>介紹</a:t>
+              <a:t>循環神經網路語言模型</a:t>
             </a:r>
           </a:p>
         </p:txBody>
@@ -11440,7 +11387,7 @@
     </p:spTree>
     <p:extLst>
       <p:ext uri="{BB962C8B-B14F-4D97-AF65-F5344CB8AC3E}">
-        <p14:creationId xmlns:p14="http://schemas.microsoft.com/office/powerpoint/2010/main" val="971880810"/>
+        <p14:creationId xmlns:p14="http://schemas.microsoft.com/office/powerpoint/2010/main" val="720321569"/>
       </p:ext>
     </p:extLst>
   </p:cSld>
@@ -11479,7 +11426,7 @@
         <p:spPr>
           <a:xfrm>
             <a:off x="685800" y="1828800"/>
-            <a:ext cx="8077200" cy="2062103"/>
+            <a:ext cx="8077200" cy="584775"/>
           </a:xfrm>
           <a:prstGeom prst="rect">
             <a:avLst/>
@@ -11509,7 +11456,7 @@
                 <a:ea typeface="微軟正黑體" panose="020B0604030504040204" pitchFamily="34" charset="-120"/>
                 <a:cs typeface="Heiti TC Light"/>
               </a:rPr>
-              <a:t>使用</a:t>
+              <a:t>什麼是</a:t>
             </a:r>
             <a:r>
               <a:rPr kumimoji="1" lang="en-US" altLang="zh-TW" sz="3200" dirty="0">
@@ -11524,7 +11471,7 @@
                 <a:ea typeface="微軟正黑體" panose="020B0604030504040204" pitchFamily="34" charset="-120"/>
                 <a:cs typeface="Heiti TC Light"/>
               </a:rPr>
-              <a:t>Embedding</a:t>
+              <a:t>Transformer</a:t>
             </a:r>
             <a:r>
               <a:rPr kumimoji="1" lang="zh-TW" altLang="en-US" sz="3200" dirty="0">
@@ -11539,106 +11486,7 @@
                 <a:ea typeface="微軟正黑體" panose="020B0604030504040204" pitchFamily="34" charset="-120"/>
                 <a:cs typeface="Heiti TC Light"/>
               </a:rPr>
-              <a:t>的概念</a:t>
-            </a:r>
-            <a:endParaRPr kumimoji="1" lang="en-US" altLang="zh-TW" sz="3200" dirty="0">
-              <a:effectLst>
-                <a:outerShdw blurRad="38100" dist="38100" dir="2700000" algn="tl">
-                  <a:srgbClr val="000000">
-                    <a:alpha val="43137"/>
-                  </a:srgbClr>
-                </a:outerShdw>
-              </a:effectLst>
-              <a:latin typeface="微軟正黑體" panose="020B0604030504040204" pitchFamily="34" charset="-120"/>
-              <a:ea typeface="微軟正黑體" panose="020B0604030504040204" pitchFamily="34" charset="-120"/>
-              <a:cs typeface="Heiti TC Light"/>
-            </a:endParaRPr>
-          </a:p>
-          <a:p>
-            <a:pPr marL="361950" indent="-361950">
-              <a:buFont typeface="Arial" panose="020B0604020202020204" pitchFamily="34" charset="0"/>
-              <a:buChar char="•"/>
-            </a:pPr>
-            <a:r>
-              <a:rPr kumimoji="1" lang="zh-TW" altLang="en-US" sz="3200" dirty="0">
-                <a:effectLst>
-                  <a:outerShdw blurRad="38100" dist="38100" dir="2700000" algn="tl">
-                    <a:srgbClr val="000000">
-                      <a:alpha val="43137"/>
-                    </a:srgbClr>
-                  </a:outerShdw>
-                </a:effectLst>
-                <a:latin typeface="微軟正黑體" panose="020B0604030504040204" pitchFamily="34" charset="-120"/>
-                <a:ea typeface="微軟正黑體" panose="020B0604030504040204" pitchFamily="34" charset="-120"/>
-                <a:cs typeface="Heiti TC Light"/>
-              </a:rPr>
-              <a:t>文字對應到向量空間</a:t>
-            </a:r>
-            <a:endParaRPr kumimoji="1" lang="en-US" altLang="zh-TW" sz="3200" dirty="0">
-              <a:effectLst>
-                <a:outerShdw blurRad="38100" dist="38100" dir="2700000" algn="tl">
-                  <a:srgbClr val="000000">
-                    <a:alpha val="43137"/>
-                  </a:srgbClr>
-                </a:outerShdw>
-              </a:effectLst>
-              <a:latin typeface="微軟正黑體" panose="020B0604030504040204" pitchFamily="34" charset="-120"/>
-              <a:ea typeface="微軟正黑體" panose="020B0604030504040204" pitchFamily="34" charset="-120"/>
-              <a:cs typeface="Heiti TC Light"/>
-            </a:endParaRPr>
-          </a:p>
-          <a:p>
-            <a:pPr marL="361950" indent="-361950">
-              <a:buFont typeface="Arial" panose="020B0604020202020204" pitchFamily="34" charset="0"/>
-              <a:buChar char="•"/>
-            </a:pPr>
-            <a:r>
-              <a:rPr kumimoji="1" lang="zh-TW" altLang="en-US" sz="3200" dirty="0">
-                <a:effectLst>
-                  <a:outerShdw blurRad="38100" dist="38100" dir="2700000" algn="tl">
-                    <a:srgbClr val="000000">
-                      <a:alpha val="43137"/>
-                    </a:srgbClr>
-                  </a:outerShdw>
-                </a:effectLst>
-                <a:latin typeface="微軟正黑體" panose="020B0604030504040204" pitchFamily="34" charset="-120"/>
-                <a:ea typeface="微軟正黑體" panose="020B0604030504040204" pitchFamily="34" charset="-120"/>
-                <a:cs typeface="Heiti TC Light"/>
-              </a:rPr>
-              <a:t>語言模型的第一層</a:t>
-            </a:r>
-            <a:endParaRPr kumimoji="1" lang="en-US" altLang="zh-TW" sz="3200" dirty="0">
-              <a:effectLst>
-                <a:outerShdw blurRad="38100" dist="38100" dir="2700000" algn="tl">
-                  <a:srgbClr val="000000">
-                    <a:alpha val="43137"/>
-                  </a:srgbClr>
-                </a:outerShdw>
-              </a:effectLst>
-              <a:latin typeface="微軟正黑體" panose="020B0604030504040204" pitchFamily="34" charset="-120"/>
-              <a:ea typeface="微軟正黑體" panose="020B0604030504040204" pitchFamily="34" charset="-120"/>
-              <a:cs typeface="Heiti TC Light"/>
-            </a:endParaRPr>
-          </a:p>
-          <a:p>
-            <a:pPr marL="361950" indent="-361950">
-              <a:buFont typeface="Arial" panose="020B0604020202020204" pitchFamily="34" charset="0"/>
-              <a:buChar char="•"/>
-            </a:pPr>
-            <a:r>
-              <a:rPr kumimoji="1" lang="zh-TW" altLang="en-US" sz="3200" dirty="0">
-                <a:effectLst>
-                  <a:outerShdw blurRad="38100" dist="38100" dir="2700000" algn="tl">
-                    <a:srgbClr val="000000">
-                      <a:alpha val="43137"/>
-                    </a:srgbClr>
-                  </a:outerShdw>
-                </a:effectLst>
-                <a:latin typeface="微軟正黑體" panose="020B0604030504040204" pitchFamily="34" charset="-120"/>
-                <a:ea typeface="微軟正黑體" panose="020B0604030504040204" pitchFamily="34" charset="-120"/>
-                <a:cs typeface="Heiti TC Light"/>
-              </a:rPr>
-              <a:t>循環神經網路的問題</a:t>
+              <a:t>網路</a:t>
             </a:r>
             <a:endParaRPr kumimoji="1" lang="en-US" altLang="zh-TW" sz="3200" dirty="0">
               <a:effectLst>
@@ -11716,7 +11564,7 @@
                 <a:ea typeface="微軟正黑體" panose="020B0604030504040204" pitchFamily="34" charset="-120"/>
                 <a:cs typeface="+mn-cs"/>
               </a:rPr>
-              <a:t>8. </a:t>
+              <a:t>8. Transformer</a:t>
             </a:r>
             <a:r>
               <a:rPr kumimoji="0" lang="zh-TW" altLang="en-US" sz="4800" b="1" i="0" u="none" strike="noStrike" kern="0" cap="none" spc="0" normalizeH="0" baseline="0" noProof="0" dirty="0">
@@ -11739,7 +11587,7 @@
                 <a:ea typeface="微軟正黑體" panose="020B0604030504040204" pitchFamily="34" charset="-120"/>
                 <a:cs typeface="+mn-cs"/>
               </a:rPr>
-              <a:t>循環神經網路語言模型</a:t>
+              <a:t>的出現</a:t>
             </a:r>
           </a:p>
         </p:txBody>
@@ -11747,7 +11595,7 @@
     </p:spTree>
     <p:extLst>
       <p:ext uri="{BB962C8B-B14F-4D97-AF65-F5344CB8AC3E}">
-        <p14:creationId xmlns:p14="http://schemas.microsoft.com/office/powerpoint/2010/main" val="720321569"/>
+        <p14:creationId xmlns:p14="http://schemas.microsoft.com/office/powerpoint/2010/main" val="4158245854"/>
       </p:ext>
     </p:extLst>
   </p:cSld>
@@ -11786,7 +11634,7 @@
         <p:spPr>
           <a:xfrm>
             <a:off x="685800" y="1828800"/>
-            <a:ext cx="8077200" cy="584775"/>
+            <a:ext cx="8077200" cy="3539430"/>
           </a:xfrm>
           <a:prstGeom prst="rect">
             <a:avLst/>
@@ -11816,37 +11664,7 @@
                 <a:ea typeface="微軟正黑體" panose="020B0604030504040204" pitchFamily="34" charset="-120"/>
                 <a:cs typeface="Heiti TC Light"/>
               </a:rPr>
-              <a:t>什麼是</a:t>
-            </a:r>
-            <a:r>
-              <a:rPr kumimoji="1" lang="en-US" altLang="zh-TW" sz="3200" dirty="0">
-                <a:effectLst>
-                  <a:outerShdw blurRad="38100" dist="38100" dir="2700000" algn="tl">
-                    <a:srgbClr val="000000">
-                      <a:alpha val="43137"/>
-                    </a:srgbClr>
-                  </a:outerShdw>
-                </a:effectLst>
-                <a:latin typeface="微軟正黑體" panose="020B0604030504040204" pitchFamily="34" charset="-120"/>
-                <a:ea typeface="微軟正黑體" panose="020B0604030504040204" pitchFamily="34" charset="-120"/>
-                <a:cs typeface="Heiti TC Light"/>
-              </a:rPr>
-              <a:t>Transformer</a:t>
-            </a:r>
-            <a:r>
-              <a:rPr kumimoji="1" lang="zh-TW" altLang="en-US" sz="3200" dirty="0">
-                <a:effectLst>
-                  <a:outerShdw blurRad="38100" dist="38100" dir="2700000" algn="tl">
-                    <a:srgbClr val="000000">
-                      <a:alpha val="43137"/>
-                    </a:srgbClr>
-                  </a:outerShdw>
-                </a:effectLst>
-                <a:latin typeface="微軟正黑體" panose="020B0604030504040204" pitchFamily="34" charset="-120"/>
-                <a:ea typeface="微軟正黑體" panose="020B0604030504040204" pitchFamily="34" charset="-120"/>
-                <a:cs typeface="Heiti TC Light"/>
-              </a:rPr>
-              <a:t>網路</a:t>
+              <a:t>自監督學習</a:t>
             </a:r>
             <a:endParaRPr kumimoji="1" lang="en-US" altLang="zh-TW" sz="3200" dirty="0">
               <a:effectLst>
@@ -11861,6 +11679,147 @@
               <a:cs typeface="Heiti TC Light"/>
             </a:endParaRPr>
           </a:p>
+          <a:p>
+            <a:pPr marL="361950" indent="-361950">
+              <a:buFont typeface="Arial" panose="020B0604020202020204" pitchFamily="34" charset="0"/>
+              <a:buChar char="•"/>
+            </a:pPr>
+            <a:r>
+              <a:rPr kumimoji="1" lang="zh-TW" altLang="en-US" sz="3200" dirty="0">
+                <a:effectLst>
+                  <a:outerShdw blurRad="38100" dist="38100" dir="2700000" algn="tl">
+                    <a:srgbClr val="000000">
+                      <a:alpha val="43137"/>
+                    </a:srgbClr>
+                  </a:outerShdw>
+                </a:effectLst>
+                <a:latin typeface="微軟正黑體" panose="020B0604030504040204" pitchFamily="34" charset="-120"/>
+                <a:ea typeface="微軟正黑體" panose="020B0604030504040204" pitchFamily="34" charset="-120"/>
+                <a:cs typeface="Heiti TC Light"/>
+              </a:rPr>
+              <a:t>從語料庫中學習</a:t>
+            </a:r>
+            <a:endParaRPr kumimoji="1" lang="en-US" altLang="zh-TW" sz="3200" dirty="0">
+              <a:effectLst>
+                <a:outerShdw blurRad="38100" dist="38100" dir="2700000" algn="tl">
+                  <a:srgbClr val="000000">
+                    <a:alpha val="43137"/>
+                  </a:srgbClr>
+                </a:outerShdw>
+              </a:effectLst>
+              <a:latin typeface="微軟正黑體" panose="020B0604030504040204" pitchFamily="34" charset="-120"/>
+              <a:ea typeface="微軟正黑體" panose="020B0604030504040204" pitchFamily="34" charset="-120"/>
+              <a:cs typeface="Heiti TC Light"/>
+            </a:endParaRPr>
+          </a:p>
+          <a:p>
+            <a:pPr marL="361950" indent="-361950">
+              <a:buFont typeface="Arial" panose="020B0604020202020204" pitchFamily="34" charset="0"/>
+              <a:buChar char="•"/>
+            </a:pPr>
+            <a:r>
+              <a:rPr kumimoji="1" lang="zh-TW" altLang="en-US" sz="3200" dirty="0">
+                <a:effectLst>
+                  <a:outerShdw blurRad="38100" dist="38100" dir="2700000" algn="tl">
+                    <a:srgbClr val="000000">
+                      <a:alpha val="43137"/>
+                    </a:srgbClr>
+                  </a:outerShdw>
+                </a:effectLst>
+                <a:latin typeface="微軟正黑體" panose="020B0604030504040204" pitchFamily="34" charset="-120"/>
+                <a:ea typeface="微軟正黑體" panose="020B0604030504040204" pitchFamily="34" charset="-120"/>
+                <a:cs typeface="Heiti TC Light"/>
+              </a:rPr>
+              <a:t>預訓練語言模型的範式</a:t>
+            </a:r>
+            <a:endParaRPr kumimoji="1" lang="en-US" altLang="zh-TW" sz="3200" dirty="0">
+              <a:effectLst>
+                <a:outerShdw blurRad="38100" dist="38100" dir="2700000" algn="tl">
+                  <a:srgbClr val="000000">
+                    <a:alpha val="43137"/>
+                  </a:srgbClr>
+                </a:outerShdw>
+              </a:effectLst>
+              <a:latin typeface="微軟正黑體" panose="020B0604030504040204" pitchFamily="34" charset="-120"/>
+              <a:ea typeface="微軟正黑體" panose="020B0604030504040204" pitchFamily="34" charset="-120"/>
+              <a:cs typeface="Heiti TC Light"/>
+            </a:endParaRPr>
+          </a:p>
+          <a:p>
+            <a:pPr marL="361950" indent="-361950">
+              <a:buFont typeface="Arial" panose="020B0604020202020204" pitchFamily="34" charset="0"/>
+              <a:buChar char="•"/>
+            </a:pPr>
+            <a:r>
+              <a:rPr kumimoji="1" lang="zh-TW" altLang="en-US" sz="3200" dirty="0">
+                <a:effectLst>
+                  <a:outerShdw blurRad="38100" dist="38100" dir="2700000" algn="tl">
+                    <a:srgbClr val="000000">
+                      <a:alpha val="43137"/>
+                    </a:srgbClr>
+                  </a:outerShdw>
+                </a:effectLst>
+                <a:latin typeface="微軟正黑體" panose="020B0604030504040204" pitchFamily="34" charset="-120"/>
+                <a:ea typeface="微軟正黑體" panose="020B0604030504040204" pitchFamily="34" charset="-120"/>
+                <a:cs typeface="Heiti TC Light"/>
+              </a:rPr>
+              <a:t>預訓練語言模型的訓練</a:t>
+            </a:r>
+          </a:p>
+          <a:p>
+            <a:pPr marL="361950" indent="-361950">
+              <a:buFont typeface="Arial" panose="020B0604020202020204" pitchFamily="34" charset="0"/>
+              <a:buChar char="•"/>
+            </a:pPr>
+            <a:endParaRPr kumimoji="1" lang="zh-TW" altLang="en-US" sz="3200" dirty="0">
+              <a:effectLst>
+                <a:outerShdw blurRad="38100" dist="38100" dir="2700000" algn="tl">
+                  <a:srgbClr val="000000">
+                    <a:alpha val="43137"/>
+                  </a:srgbClr>
+                </a:outerShdw>
+              </a:effectLst>
+              <a:latin typeface="微軟正黑體" panose="020B0604030504040204" pitchFamily="34" charset="-120"/>
+              <a:ea typeface="微軟正黑體" panose="020B0604030504040204" pitchFamily="34" charset="-120"/>
+              <a:cs typeface="Heiti TC Light"/>
+            </a:endParaRPr>
+          </a:p>
+          <a:p>
+            <a:pPr marL="361950" indent="-361950">
+              <a:buFont typeface="Arial" panose="020B0604020202020204" pitchFamily="34" charset="0"/>
+              <a:buChar char="•"/>
+            </a:pPr>
+            <a:endParaRPr kumimoji="1" lang="en-US" altLang="zh-TW" sz="3200" dirty="0">
+              <a:effectLst>
+                <a:outerShdw blurRad="38100" dist="38100" dir="2700000" algn="tl">
+                  <a:srgbClr val="000000">
+                    <a:alpha val="43137"/>
+                  </a:srgbClr>
+                </a:outerShdw>
+              </a:effectLst>
+              <a:latin typeface="微軟正黑體" panose="020B0604030504040204" pitchFamily="34" charset="-120"/>
+              <a:ea typeface="微軟正黑體" panose="020B0604030504040204" pitchFamily="34" charset="-120"/>
+              <a:cs typeface="Heiti TC Light"/>
+            </a:endParaRPr>
+          </a:p>
+          <a:p>
+            <a:pPr marL="361950" indent="-361950">
+              <a:buFont typeface="Arial" panose="020B0604020202020204" pitchFamily="34" charset="0"/>
+              <a:buChar char="•"/>
+            </a:pPr>
+            <a:endParaRPr kumimoji="1" lang="en-US" altLang="zh-TW" sz="3200" dirty="0">
+              <a:effectLst>
+                <a:outerShdw blurRad="38100" dist="38100" dir="2700000" algn="tl">
+                  <a:srgbClr val="000000">
+                    <a:alpha val="43137"/>
+                  </a:srgbClr>
+                </a:outerShdw>
+              </a:effectLst>
+              <a:latin typeface="微軟正黑體" panose="020B0604030504040204" pitchFamily="34" charset="-120"/>
+              <a:ea typeface="微軟正黑體" panose="020B0604030504040204" pitchFamily="34" charset="-120"/>
+              <a:cs typeface="Heiti TC Light"/>
+            </a:endParaRPr>
+          </a:p>
         </p:txBody>
       </p:sp>
       <p:sp>
@@ -11874,7 +11833,7 @@
         <p:spPr>
           <a:xfrm>
             <a:off x="1295400" y="457200"/>
-            <a:ext cx="7239000" cy="990600"/>
+            <a:ext cx="6400800" cy="990600"/>
           </a:xfrm>
           <a:prstGeom prst="rect">
             <a:avLst/>
@@ -11924,7 +11883,7 @@
                 <a:ea typeface="微軟正黑體" panose="020B0604030504040204" pitchFamily="34" charset="-120"/>
                 <a:cs typeface="+mn-cs"/>
               </a:rPr>
-              <a:t>9. Transformer</a:t>
+              <a:t>9. </a:t>
             </a:r>
             <a:r>
               <a:rPr kumimoji="0" lang="zh-TW" altLang="en-US" sz="4800" b="1" i="0" u="none" strike="noStrike" kern="0" cap="none" spc="0" normalizeH="0" baseline="0" noProof="0" dirty="0">
@@ -11947,7 +11906,7 @@
                 <a:ea typeface="微軟正黑體" panose="020B0604030504040204" pitchFamily="34" charset="-120"/>
                 <a:cs typeface="+mn-cs"/>
               </a:rPr>
-              <a:t>的出現</a:t>
+              <a:t>預訓練語言模型</a:t>
             </a:r>
           </a:p>
         </p:txBody>
@@ -11955,7 +11914,7 @@
     </p:spTree>
     <p:extLst>
       <p:ext uri="{BB962C8B-B14F-4D97-AF65-F5344CB8AC3E}">
-        <p14:creationId xmlns:p14="http://schemas.microsoft.com/office/powerpoint/2010/main" val="4158245854"/>
+        <p14:creationId xmlns:p14="http://schemas.microsoft.com/office/powerpoint/2010/main" val="505535897"/>
       </p:ext>
     </p:extLst>
   </p:cSld>
@@ -11993,8 +11952,8 @@
         </p:nvSpPr>
         <p:spPr>
           <a:xfrm>
-            <a:off x="685800" y="1828800"/>
-            <a:ext cx="8077200" cy="3539430"/>
+            <a:off x="685800" y="1513744"/>
+            <a:ext cx="8077200" cy="1077218"/>
           </a:xfrm>
           <a:prstGeom prst="rect">
             <a:avLst/>
@@ -12007,7 +11966,7 @@
           </a:bodyPr>
           <a:lstStyle/>
           <a:p>
-            <a:pPr marL="361950" indent="-361950">
+            <a:pPr marL="457200" indent="-457200">
               <a:buFont typeface="Arial" panose="020B0604020202020204" pitchFamily="34" charset="0"/>
               <a:buChar char="•"/>
             </a:pPr>
@@ -12024,7 +11983,7 @@
                 <a:ea typeface="微軟正黑體" panose="020B0604030504040204" pitchFamily="34" charset="-120"/>
                 <a:cs typeface="Heiti TC Light"/>
               </a:rPr>
-              <a:t>自監督學習</a:t>
+              <a:t>表現非常好</a:t>
             </a:r>
             <a:endParaRPr kumimoji="1" lang="en-US" altLang="zh-TW" sz="3200" dirty="0">
               <a:effectLst>
@@ -12040,7 +11999,7 @@
             </a:endParaRPr>
           </a:p>
           <a:p>
-            <a:pPr marL="361950" indent="-361950">
+            <a:pPr marL="457200" indent="-457200">
               <a:buFont typeface="Arial" panose="020B0604020202020204" pitchFamily="34" charset="0"/>
               <a:buChar char="•"/>
             </a:pPr>
@@ -12057,7 +12016,37 @@
                 <a:ea typeface="微軟正黑體" panose="020B0604030504040204" pitchFamily="34" charset="-120"/>
                 <a:cs typeface="Heiti TC Light"/>
               </a:rPr>
-              <a:t>從語料庫中學習</a:t>
+              <a:t>但需要</a:t>
+            </a:r>
+            <a:r>
+              <a:rPr kumimoji="1" lang="en-US" altLang="zh-TW" sz="3200" dirty="0">
+                <a:effectLst>
+                  <a:outerShdw blurRad="38100" dist="38100" dir="2700000" algn="tl">
+                    <a:srgbClr val="000000">
+                      <a:alpha val="43137"/>
+                    </a:srgbClr>
+                  </a:outerShdw>
+                </a:effectLst>
+                <a:latin typeface="微軟正黑體" panose="020B0604030504040204" pitchFamily="34" charset="-120"/>
+                <a:ea typeface="微軟正黑體" panose="020B0604030504040204" pitchFamily="34" charset="-120"/>
+                <a:cs typeface="Heiti TC Light"/>
+              </a:rPr>
+              <a:t>Label</a:t>
+            </a:r>
+            <a:r>
+              <a:rPr kumimoji="1" lang="zh-TW" altLang="en-US" sz="3200" dirty="0">
+                <a:effectLst>
+                  <a:outerShdw blurRad="38100" dist="38100" dir="2700000" algn="tl">
+                    <a:srgbClr val="000000">
+                      <a:alpha val="43137"/>
+                    </a:srgbClr>
+                  </a:outerShdw>
+                </a:effectLst>
+                <a:latin typeface="微軟正黑體" panose="020B0604030504040204" pitchFamily="34" charset="-120"/>
+                <a:ea typeface="微軟正黑體" panose="020B0604030504040204" pitchFamily="34" charset="-120"/>
+                <a:cs typeface="Heiti TC Light"/>
+              </a:rPr>
+              <a:t>的資料</a:t>
             </a:r>
             <a:endParaRPr kumimoji="1" lang="en-US" altLang="zh-TW" sz="3200" dirty="0">
               <a:effectLst>
@@ -12072,114 +12061,6 @@
               <a:cs typeface="Heiti TC Light"/>
             </a:endParaRPr>
           </a:p>
-          <a:p>
-            <a:pPr marL="361950" indent="-361950">
-              <a:buFont typeface="Arial" panose="020B0604020202020204" pitchFamily="34" charset="0"/>
-              <a:buChar char="•"/>
-            </a:pPr>
-            <a:r>
-              <a:rPr kumimoji="1" lang="zh-TW" altLang="en-US" sz="3200" dirty="0">
-                <a:effectLst>
-                  <a:outerShdw blurRad="38100" dist="38100" dir="2700000" algn="tl">
-                    <a:srgbClr val="000000">
-                      <a:alpha val="43137"/>
-                    </a:srgbClr>
-                  </a:outerShdw>
-                </a:effectLst>
-                <a:latin typeface="微軟正黑體" panose="020B0604030504040204" pitchFamily="34" charset="-120"/>
-                <a:ea typeface="微軟正黑體" panose="020B0604030504040204" pitchFamily="34" charset="-120"/>
-                <a:cs typeface="Heiti TC Light"/>
-              </a:rPr>
-              <a:t>預訓練語言模型的範式</a:t>
-            </a:r>
-            <a:endParaRPr kumimoji="1" lang="en-US" altLang="zh-TW" sz="3200" dirty="0">
-              <a:effectLst>
-                <a:outerShdw blurRad="38100" dist="38100" dir="2700000" algn="tl">
-                  <a:srgbClr val="000000">
-                    <a:alpha val="43137"/>
-                  </a:srgbClr>
-                </a:outerShdw>
-              </a:effectLst>
-              <a:latin typeface="微軟正黑體" panose="020B0604030504040204" pitchFamily="34" charset="-120"/>
-              <a:ea typeface="微軟正黑體" panose="020B0604030504040204" pitchFamily="34" charset="-120"/>
-              <a:cs typeface="Heiti TC Light"/>
-            </a:endParaRPr>
-          </a:p>
-          <a:p>
-            <a:pPr marL="361950" indent="-361950">
-              <a:buFont typeface="Arial" panose="020B0604020202020204" pitchFamily="34" charset="0"/>
-              <a:buChar char="•"/>
-            </a:pPr>
-            <a:r>
-              <a:rPr kumimoji="1" lang="zh-TW" altLang="en-US" sz="3200" dirty="0">
-                <a:effectLst>
-                  <a:outerShdw blurRad="38100" dist="38100" dir="2700000" algn="tl">
-                    <a:srgbClr val="000000">
-                      <a:alpha val="43137"/>
-                    </a:srgbClr>
-                  </a:outerShdw>
-                </a:effectLst>
-                <a:latin typeface="微軟正黑體" panose="020B0604030504040204" pitchFamily="34" charset="-120"/>
-                <a:ea typeface="微軟正黑體" panose="020B0604030504040204" pitchFamily="34" charset="-120"/>
-                <a:cs typeface="Heiti TC Light"/>
-              </a:rPr>
-              <a:t>預訓練語言模型的訓練</a:t>
-            </a:r>
-          </a:p>
-          <a:p>
-            <a:pPr marL="361950" indent="-361950">
-              <a:buFont typeface="Arial" panose="020B0604020202020204" pitchFamily="34" charset="0"/>
-              <a:buChar char="•"/>
-            </a:pPr>
-            <a:endParaRPr kumimoji="1" lang="zh-TW" altLang="en-US" sz="3200" dirty="0">
-              <a:effectLst>
-                <a:outerShdw blurRad="38100" dist="38100" dir="2700000" algn="tl">
-                  <a:srgbClr val="000000">
-                    <a:alpha val="43137"/>
-                  </a:srgbClr>
-                </a:outerShdw>
-              </a:effectLst>
-              <a:latin typeface="微軟正黑體" panose="020B0604030504040204" pitchFamily="34" charset="-120"/>
-              <a:ea typeface="微軟正黑體" panose="020B0604030504040204" pitchFamily="34" charset="-120"/>
-              <a:cs typeface="Heiti TC Light"/>
-            </a:endParaRPr>
-          </a:p>
-          <a:p>
-            <a:pPr marL="361950" indent="-361950">
-              <a:buFont typeface="Arial" panose="020B0604020202020204" pitchFamily="34" charset="0"/>
-              <a:buChar char="•"/>
-            </a:pPr>
-            <a:endParaRPr kumimoji="1" lang="en-US" altLang="zh-TW" sz="3200" dirty="0">
-              <a:effectLst>
-                <a:outerShdw blurRad="38100" dist="38100" dir="2700000" algn="tl">
-                  <a:srgbClr val="000000">
-                    <a:alpha val="43137"/>
-                  </a:srgbClr>
-                </a:outerShdw>
-              </a:effectLst>
-              <a:latin typeface="微軟正黑體" panose="020B0604030504040204" pitchFamily="34" charset="-120"/>
-              <a:ea typeface="微軟正黑體" panose="020B0604030504040204" pitchFamily="34" charset="-120"/>
-              <a:cs typeface="Heiti TC Light"/>
-            </a:endParaRPr>
-          </a:p>
-          <a:p>
-            <a:pPr marL="361950" indent="-361950">
-              <a:buFont typeface="Arial" panose="020B0604020202020204" pitchFamily="34" charset="0"/>
-              <a:buChar char="•"/>
-            </a:pPr>
-            <a:endParaRPr kumimoji="1" lang="en-US" altLang="zh-TW" sz="3200" dirty="0">
-              <a:effectLst>
-                <a:outerShdw blurRad="38100" dist="38100" dir="2700000" algn="tl">
-                  <a:srgbClr val="000000">
-                    <a:alpha val="43137"/>
-                  </a:srgbClr>
-                </a:outerShdw>
-              </a:effectLst>
-              <a:latin typeface="微軟正黑體" panose="020B0604030504040204" pitchFamily="34" charset="-120"/>
-              <a:ea typeface="微軟正黑體" panose="020B0604030504040204" pitchFamily="34" charset="-120"/>
-              <a:cs typeface="Heiti TC Light"/>
-            </a:endParaRPr>
-          </a:p>
         </p:txBody>
       </p:sp>
       <p:sp>
@@ -12192,8 +12073,8 @@
         </p:nvSpPr>
         <p:spPr>
           <a:xfrm>
-            <a:off x="1295400" y="457200"/>
-            <a:ext cx="6400800" cy="990600"/>
+            <a:off x="1371600" y="304800"/>
+            <a:ext cx="7162800" cy="990600"/>
           </a:xfrm>
           <a:prstGeom prst="rect">
             <a:avLst/>
@@ -12266,7 +12147,53 @@
                 <a:ea typeface="微軟正黑體" panose="020B0604030504040204" pitchFamily="34" charset="-120"/>
                 <a:cs typeface="+mn-cs"/>
               </a:rPr>
-              <a:t>預訓練語言模型</a:t>
+              <a:t>預訓練</a:t>
+            </a:r>
+            <a:r>
+              <a:rPr kumimoji="0" lang="en-US" altLang="zh-TW" sz="4800" b="1" i="0" u="none" strike="noStrike" kern="0" cap="none" spc="0" normalizeH="0" baseline="0" noProof="0" dirty="0">
+                <a:ln>
+                  <a:noFill/>
+                </a:ln>
+                <a:solidFill>
+                  <a:srgbClr val="00B0F0"/>
+                </a:solidFill>
+                <a:effectLst>
+                  <a:outerShdw blurRad="38100" dist="38100" dir="2700000" algn="tl">
+                    <a:srgbClr val="000000">
+                      <a:alpha val="43137"/>
+                    </a:srgbClr>
+                  </a:outerShdw>
+                </a:effectLst>
+                <a:uLnTx/>
+                <a:uFillTx/>
+                <a:latin typeface="微軟正黑體" panose="020B0604030504040204" pitchFamily="34" charset="-120"/>
+                <a:ea typeface="微軟正黑體" panose="020B0604030504040204" pitchFamily="34" charset="-120"/>
+                <a:cs typeface="+mn-cs"/>
+              </a:rPr>
+              <a:t>+</a:t>
+            </a:r>
+            <a:r>
+              <a:rPr kumimoji="0" lang="zh-TW" altLang="en-US" sz="4800" b="1" i="0" u="none" strike="noStrike" kern="0" cap="none" spc="0" normalizeH="0" baseline="0" noProof="0" dirty="0">
+                <a:ln>
+                  <a:noFill/>
+                </a:ln>
+                <a:solidFill>
+                  <a:srgbClr val="00B0F0"/>
+                </a:solidFill>
+                <a:effectLst>
+                  <a:outerShdw blurRad="38100" dist="38100" dir="2700000" algn="tl">
+                    <a:srgbClr val="000000">
+                      <a:alpha val="43137"/>
+                    </a:srgbClr>
+                  </a:outerShdw>
+                </a:effectLst>
+                <a:uLnTx/>
+                <a:uFillTx/>
+                <a:latin typeface="微軟正黑體" panose="020B0604030504040204" pitchFamily="34" charset="-120"/>
+                <a:ea typeface="微軟正黑體" panose="020B0604030504040204" pitchFamily="34" charset="-120"/>
+                <a:cs typeface="+mn-cs"/>
+              </a:rPr>
+              <a:t>微調的範式</a:t>
             </a:r>
           </a:p>
         </p:txBody>
@@ -12274,7 +12201,7 @@
     </p:spTree>
     <p:extLst>
       <p:ext uri="{BB962C8B-B14F-4D97-AF65-F5344CB8AC3E}">
-        <p14:creationId xmlns:p14="http://schemas.microsoft.com/office/powerpoint/2010/main" val="505535897"/>
+        <p14:creationId xmlns:p14="http://schemas.microsoft.com/office/powerpoint/2010/main" val="69547491"/>
       </p:ext>
     </p:extLst>
   </p:cSld>
@@ -12312,8 +12239,8 @@
         </p:nvSpPr>
         <p:spPr>
           <a:xfrm>
-            <a:off x="685800" y="1513744"/>
-            <a:ext cx="8077200" cy="1077218"/>
+            <a:off x="685800" y="1841242"/>
+            <a:ext cx="8077200" cy="584775"/>
           </a:xfrm>
           <a:prstGeom prst="rect">
             <a:avLst/>
@@ -12326,7 +12253,7 @@
           </a:bodyPr>
           <a:lstStyle/>
           <a:p>
-            <a:pPr marL="457200" indent="-457200">
+            <a:pPr marL="361950" indent="-361950">
               <a:buFont typeface="Arial" panose="020B0604020202020204" pitchFamily="34" charset="0"/>
               <a:buChar char="•"/>
             </a:pPr>
@@ -12343,7 +12270,7 @@
                 <a:ea typeface="微軟正黑體" panose="020B0604030504040204" pitchFamily="34" charset="-120"/>
                 <a:cs typeface="Heiti TC Light"/>
               </a:rPr>
-              <a:t>表現非常好</a:t>
+              <a:t>預訓練語言模型範式的問題</a:t>
             </a:r>
             <a:endParaRPr kumimoji="1" lang="en-US" altLang="zh-TW" sz="3200" dirty="0">
               <a:effectLst>
@@ -12358,69 +12285,6 @@
               <a:cs typeface="Heiti TC Light"/>
             </a:endParaRPr>
           </a:p>
-          <a:p>
-            <a:pPr marL="457200" indent="-457200">
-              <a:buFont typeface="Arial" panose="020B0604020202020204" pitchFamily="34" charset="0"/>
-              <a:buChar char="•"/>
-            </a:pPr>
-            <a:r>
-              <a:rPr kumimoji="1" lang="zh-TW" altLang="en-US" sz="3200" dirty="0">
-                <a:effectLst>
-                  <a:outerShdw blurRad="38100" dist="38100" dir="2700000" algn="tl">
-                    <a:srgbClr val="000000">
-                      <a:alpha val="43137"/>
-                    </a:srgbClr>
-                  </a:outerShdw>
-                </a:effectLst>
-                <a:latin typeface="微軟正黑體" panose="020B0604030504040204" pitchFamily="34" charset="-120"/>
-                <a:ea typeface="微軟正黑體" panose="020B0604030504040204" pitchFamily="34" charset="-120"/>
-                <a:cs typeface="Heiti TC Light"/>
-              </a:rPr>
-              <a:t>但需要</a:t>
-            </a:r>
-            <a:r>
-              <a:rPr kumimoji="1" lang="en-US" altLang="zh-TW" sz="3200" dirty="0">
-                <a:effectLst>
-                  <a:outerShdw blurRad="38100" dist="38100" dir="2700000" algn="tl">
-                    <a:srgbClr val="000000">
-                      <a:alpha val="43137"/>
-                    </a:srgbClr>
-                  </a:outerShdw>
-                </a:effectLst>
-                <a:latin typeface="微軟正黑體" panose="020B0604030504040204" pitchFamily="34" charset="-120"/>
-                <a:ea typeface="微軟正黑體" panose="020B0604030504040204" pitchFamily="34" charset="-120"/>
-                <a:cs typeface="Heiti TC Light"/>
-              </a:rPr>
-              <a:t>Label</a:t>
-            </a:r>
-            <a:r>
-              <a:rPr kumimoji="1" lang="zh-TW" altLang="en-US" sz="3200" dirty="0">
-                <a:effectLst>
-                  <a:outerShdw blurRad="38100" dist="38100" dir="2700000" algn="tl">
-                    <a:srgbClr val="000000">
-                      <a:alpha val="43137"/>
-                    </a:srgbClr>
-                  </a:outerShdw>
-                </a:effectLst>
-                <a:latin typeface="微軟正黑體" panose="020B0604030504040204" pitchFamily="34" charset="-120"/>
-                <a:ea typeface="微軟正黑體" panose="020B0604030504040204" pitchFamily="34" charset="-120"/>
-                <a:cs typeface="Heiti TC Light"/>
-              </a:rPr>
-              <a:t>的資料</a:t>
-            </a:r>
-            <a:endParaRPr kumimoji="1" lang="en-US" altLang="zh-TW" sz="3200" dirty="0">
-              <a:effectLst>
-                <a:outerShdw blurRad="38100" dist="38100" dir="2700000" algn="tl">
-                  <a:srgbClr val="000000">
-                    <a:alpha val="43137"/>
-                  </a:srgbClr>
-                </a:outerShdw>
-              </a:effectLst>
-              <a:latin typeface="微軟正黑體" panose="020B0604030504040204" pitchFamily="34" charset="-120"/>
-              <a:ea typeface="微軟正黑體" panose="020B0604030504040204" pitchFamily="34" charset="-120"/>
-              <a:cs typeface="Heiti TC Light"/>
-            </a:endParaRPr>
-          </a:p>
         </p:txBody>
       </p:sp>
       <p:sp>
@@ -12433,8 +12297,8 @@
         </p:nvSpPr>
         <p:spPr>
           <a:xfrm>
-            <a:off x="1371600" y="304800"/>
-            <a:ext cx="7162800" cy="990600"/>
+            <a:off x="762000" y="304800"/>
+            <a:ext cx="7543800" cy="990600"/>
           </a:xfrm>
           <a:prstGeom prst="rect">
             <a:avLst/>
@@ -12507,53 +12371,7 @@
                 <a:ea typeface="微軟正黑體" panose="020B0604030504040204" pitchFamily="34" charset="-120"/>
                 <a:cs typeface="+mn-cs"/>
               </a:rPr>
-              <a:t>預訓練</a:t>
-            </a:r>
-            <a:r>
-              <a:rPr kumimoji="0" lang="en-US" altLang="zh-TW" sz="4800" b="1" i="0" u="none" strike="noStrike" kern="0" cap="none" spc="0" normalizeH="0" baseline="0" noProof="0" dirty="0">
-                <a:ln>
-                  <a:noFill/>
-                </a:ln>
-                <a:solidFill>
-                  <a:srgbClr val="00B0F0"/>
-                </a:solidFill>
-                <a:effectLst>
-                  <a:outerShdw blurRad="38100" dist="38100" dir="2700000" algn="tl">
-                    <a:srgbClr val="000000">
-                      <a:alpha val="43137"/>
-                    </a:srgbClr>
-                  </a:outerShdw>
-                </a:effectLst>
-                <a:uLnTx/>
-                <a:uFillTx/>
-                <a:latin typeface="微軟正黑體" panose="020B0604030504040204" pitchFamily="34" charset="-120"/>
-                <a:ea typeface="微軟正黑體" panose="020B0604030504040204" pitchFamily="34" charset="-120"/>
-                <a:cs typeface="+mn-cs"/>
-              </a:rPr>
-              <a:t>+</a:t>
-            </a:r>
-            <a:r>
-              <a:rPr kumimoji="0" lang="zh-TW" altLang="en-US" sz="4800" b="1" i="0" u="none" strike="noStrike" kern="0" cap="none" spc="0" normalizeH="0" baseline="0" noProof="0" dirty="0">
-                <a:ln>
-                  <a:noFill/>
-                </a:ln>
-                <a:solidFill>
-                  <a:srgbClr val="00B0F0"/>
-                </a:solidFill>
-                <a:effectLst>
-                  <a:outerShdw blurRad="38100" dist="38100" dir="2700000" algn="tl">
-                    <a:srgbClr val="000000">
-                      <a:alpha val="43137"/>
-                    </a:srgbClr>
-                  </a:outerShdw>
-                </a:effectLst>
-                <a:uLnTx/>
-                <a:uFillTx/>
-                <a:latin typeface="微軟正黑體" panose="020B0604030504040204" pitchFamily="34" charset="-120"/>
-                <a:ea typeface="微軟正黑體" panose="020B0604030504040204" pitchFamily="34" charset="-120"/>
-                <a:cs typeface="+mn-cs"/>
-              </a:rPr>
-              <a:t>微調的範式</a:t>
+              <a:t>預訓練語言模型的問題</a:t>
             </a:r>
           </a:p>
         </p:txBody>
@@ -12561,7 +12379,7 @@
     </p:spTree>
     <p:extLst>
       <p:ext uri="{BB962C8B-B14F-4D97-AF65-F5344CB8AC3E}">
-        <p14:creationId xmlns:p14="http://schemas.microsoft.com/office/powerpoint/2010/main" val="69547491"/>
+        <p14:creationId xmlns:p14="http://schemas.microsoft.com/office/powerpoint/2010/main" val="2302608503"/>
       </p:ext>
     </p:extLst>
   </p:cSld>
@@ -12599,8 +12417,8 @@
         </p:nvSpPr>
         <p:spPr>
           <a:xfrm>
-            <a:off x="685800" y="1841242"/>
-            <a:ext cx="8077200" cy="584775"/>
+            <a:off x="685800" y="1676400"/>
+            <a:ext cx="8077200" cy="3046988"/>
           </a:xfrm>
           <a:prstGeom prst="rect">
             <a:avLst/>
@@ -12630,7 +12448,7 @@
                 <a:ea typeface="微軟正黑體" panose="020B0604030504040204" pitchFamily="34" charset="-120"/>
                 <a:cs typeface="Heiti TC Light"/>
               </a:rPr>
-              <a:t>預訓練語言模型範式的問題</a:t>
+              <a:t>「大型」的語言模型</a:t>
             </a:r>
             <a:endParaRPr kumimoji="1" lang="en-US" altLang="zh-TW" sz="3200" dirty="0">
               <a:effectLst>
@@ -12645,6 +12463,132 @@
               <a:cs typeface="Heiti TC Light"/>
             </a:endParaRPr>
           </a:p>
+          <a:p>
+            <a:pPr marL="361950" indent="-361950">
+              <a:buFont typeface="Arial" panose="020B0604020202020204" pitchFamily="34" charset="0"/>
+              <a:buChar char="•"/>
+            </a:pPr>
+            <a:r>
+              <a:rPr kumimoji="1" lang="zh-TW" altLang="en-US" sz="3200" dirty="0">
+                <a:effectLst>
+                  <a:outerShdw blurRad="38100" dist="38100" dir="2700000" algn="tl">
+                    <a:srgbClr val="000000">
+                      <a:alpha val="43137"/>
+                    </a:srgbClr>
+                  </a:outerShdw>
+                </a:effectLst>
+                <a:latin typeface="微軟正黑體" panose="020B0604030504040204" pitchFamily="34" charset="-120"/>
+                <a:ea typeface="微軟正黑體" panose="020B0604030504040204" pitchFamily="34" charset="-120"/>
+                <a:cs typeface="Heiti TC Light"/>
+              </a:rPr>
+              <a:t>相信模型夠聰明了</a:t>
+            </a:r>
+            <a:endParaRPr kumimoji="1" lang="en-US" altLang="zh-TW" sz="3200" dirty="0">
+              <a:effectLst>
+                <a:outerShdw blurRad="38100" dist="38100" dir="2700000" algn="tl">
+                  <a:srgbClr val="000000">
+                    <a:alpha val="43137"/>
+                  </a:srgbClr>
+                </a:outerShdw>
+              </a:effectLst>
+              <a:latin typeface="微軟正黑體" panose="020B0604030504040204" pitchFamily="34" charset="-120"/>
+              <a:ea typeface="微軟正黑體" panose="020B0604030504040204" pitchFamily="34" charset="-120"/>
+              <a:cs typeface="Heiti TC Light"/>
+            </a:endParaRPr>
+          </a:p>
+          <a:p>
+            <a:pPr marL="361950" indent="-361950">
+              <a:buFont typeface="Arial" panose="020B0604020202020204" pitchFamily="34" charset="0"/>
+              <a:buChar char="•"/>
+            </a:pPr>
+            <a:r>
+              <a:rPr kumimoji="1" lang="zh-TW" altLang="en-US" sz="3200" dirty="0">
+                <a:effectLst>
+                  <a:outerShdw blurRad="38100" dist="38100" dir="2700000" algn="tl">
+                    <a:srgbClr val="000000">
+                      <a:alpha val="43137"/>
+                    </a:srgbClr>
+                  </a:outerShdw>
+                </a:effectLst>
+                <a:latin typeface="微軟正黑體" panose="020B0604030504040204" pitchFamily="34" charset="-120"/>
+                <a:ea typeface="微軟正黑體" panose="020B0604030504040204" pitchFamily="34" charset="-120"/>
+                <a:cs typeface="Heiti TC Light"/>
+              </a:rPr>
+              <a:t>著名大型語言模型</a:t>
+            </a:r>
+            <a:endParaRPr kumimoji="1" lang="en-US" altLang="zh-TW" sz="3200" dirty="0">
+              <a:effectLst>
+                <a:outerShdw blurRad="38100" dist="38100" dir="2700000" algn="tl">
+                  <a:srgbClr val="000000">
+                    <a:alpha val="43137"/>
+                  </a:srgbClr>
+                </a:outerShdw>
+              </a:effectLst>
+              <a:latin typeface="微軟正黑體" panose="020B0604030504040204" pitchFamily="34" charset="-120"/>
+              <a:ea typeface="微軟正黑體" panose="020B0604030504040204" pitchFamily="34" charset="-120"/>
+              <a:cs typeface="Heiti TC Light"/>
+            </a:endParaRPr>
+          </a:p>
+          <a:p>
+            <a:pPr marL="361950" indent="-361950">
+              <a:buFont typeface="Arial" panose="020B0604020202020204" pitchFamily="34" charset="0"/>
+              <a:buChar char="•"/>
+            </a:pPr>
+            <a:r>
+              <a:rPr kumimoji="1" lang="en-US" altLang="zh-TW" sz="3200" dirty="0">
+                <a:effectLst>
+                  <a:outerShdw blurRad="38100" dist="38100" dir="2700000" algn="tl">
+                    <a:srgbClr val="000000">
+                      <a:alpha val="43137"/>
+                    </a:srgbClr>
+                  </a:outerShdw>
+                </a:effectLst>
+                <a:latin typeface="微軟正黑體" panose="020B0604030504040204" pitchFamily="34" charset="-120"/>
+                <a:ea typeface="微軟正黑體" panose="020B0604030504040204" pitchFamily="34" charset="-120"/>
+                <a:cs typeface="Heiti TC Light"/>
+              </a:rPr>
+              <a:t>Chinchilla Scaling Law</a:t>
+            </a:r>
+          </a:p>
+          <a:p>
+            <a:pPr marL="361950" indent="-361950">
+              <a:buFont typeface="Arial" panose="020B0604020202020204" pitchFamily="34" charset="0"/>
+              <a:buChar char="•"/>
+            </a:pPr>
+            <a:r>
+              <a:rPr kumimoji="1" lang="en-US" altLang="zh-TW" sz="3200" dirty="0">
+                <a:effectLst>
+                  <a:outerShdw blurRad="38100" dist="38100" dir="2700000" algn="tl">
+                    <a:srgbClr val="000000">
+                      <a:alpha val="43137"/>
+                    </a:srgbClr>
+                  </a:outerShdw>
+                </a:effectLst>
+                <a:latin typeface="微軟正黑體" panose="020B0604030504040204" pitchFamily="34" charset="-120"/>
+                <a:ea typeface="微軟正黑體" panose="020B0604030504040204" pitchFamily="34" charset="-120"/>
+                <a:cs typeface="Heiti TC Light"/>
+              </a:rPr>
+              <a:t>Emergent abilities</a:t>
+            </a:r>
+          </a:p>
+          <a:p>
+            <a:pPr marL="361950" indent="-361950">
+              <a:buFont typeface="Arial" panose="020B0604020202020204" pitchFamily="34" charset="0"/>
+              <a:buChar char="•"/>
+            </a:pPr>
+            <a:endParaRPr kumimoji="1" lang="en-US" altLang="zh-TW" sz="3200" dirty="0">
+              <a:effectLst>
+                <a:outerShdw blurRad="38100" dist="38100" dir="2700000" algn="tl">
+                  <a:srgbClr val="000000">
+                    <a:alpha val="43137"/>
+                  </a:srgbClr>
+                </a:outerShdw>
+              </a:effectLst>
+              <a:latin typeface="微軟正黑體" panose="020B0604030504040204" pitchFamily="34" charset="-120"/>
+              <a:ea typeface="微軟正黑體" panose="020B0604030504040204" pitchFamily="34" charset="-120"/>
+              <a:cs typeface="Heiti TC Light"/>
+            </a:endParaRPr>
+          </a:p>
         </p:txBody>
       </p:sp>
       <p:sp>
@@ -12657,8 +12601,8 @@
         </p:nvSpPr>
         <p:spPr>
           <a:xfrm>
-            <a:off x="762000" y="304800"/>
-            <a:ext cx="7543800" cy="990600"/>
+            <a:off x="2095500" y="304800"/>
+            <a:ext cx="5257800" cy="990600"/>
           </a:xfrm>
           <a:prstGeom prst="rect">
             <a:avLst/>
@@ -12731,7 +12675,7 @@
                 <a:ea typeface="微軟正黑體" panose="020B0604030504040204" pitchFamily="34" charset="-120"/>
                 <a:cs typeface="+mn-cs"/>
               </a:rPr>
-              <a:t>預訓練語言模型的問題</a:t>
+              <a:t>大型語言模型</a:t>
             </a:r>
           </a:p>
         </p:txBody>
@@ -12739,7 +12683,7 @@
     </p:spTree>
     <p:extLst>
       <p:ext uri="{BB962C8B-B14F-4D97-AF65-F5344CB8AC3E}">
-        <p14:creationId xmlns:p14="http://schemas.microsoft.com/office/powerpoint/2010/main" val="2302608503"/>
+        <p14:creationId xmlns:p14="http://schemas.microsoft.com/office/powerpoint/2010/main" val="3882104353"/>
       </p:ext>
     </p:extLst>
   </p:cSld>
@@ -12778,7 +12722,7 @@
         <p:spPr>
           <a:xfrm>
             <a:off x="685800" y="1676400"/>
-            <a:ext cx="8077200" cy="3046988"/>
+            <a:ext cx="8077200" cy="5016758"/>
           </a:xfrm>
           <a:prstGeom prst="rect">
             <a:avLst/>
@@ -12808,7 +12752,7 @@
                 <a:ea typeface="微軟正黑體" panose="020B0604030504040204" pitchFamily="34" charset="-120"/>
                 <a:cs typeface="Heiti TC Light"/>
               </a:rPr>
-              <a:t>「大型」的語言模型</a:t>
+              <a:t>大型語言模型的進化</a:t>
             </a:r>
             <a:endParaRPr kumimoji="1" lang="en-US" altLang="zh-TW" sz="3200" dirty="0">
               <a:effectLst>
@@ -12841,7 +12785,7 @@
                 <a:ea typeface="微軟正黑體" panose="020B0604030504040204" pitchFamily="34" charset="-120"/>
                 <a:cs typeface="Heiti TC Light"/>
               </a:rPr>
-              <a:t>相信模型夠聰明了</a:t>
+              <a:t>生成式模型</a:t>
             </a:r>
             <a:endParaRPr kumimoji="1" lang="en-US" altLang="zh-TW" sz="3200" dirty="0">
               <a:effectLst>
@@ -12862,6 +12806,21 @@
               <a:buChar char="•"/>
             </a:pPr>
             <a:r>
+              <a:rPr kumimoji="1" lang="en-US" altLang="zh-TW" sz="3200" dirty="0">
+                <a:effectLst>
+                  <a:outerShdw blurRad="38100" dist="38100" dir="2700000" algn="tl">
+                    <a:srgbClr val="000000">
+                      <a:alpha val="43137"/>
+                    </a:srgbClr>
+                  </a:outerShdw>
+                </a:effectLst>
+                <a:latin typeface="微軟正黑體" panose="020B0604030504040204" pitchFamily="34" charset="-120"/>
+                <a:ea typeface="微軟正黑體" panose="020B0604030504040204" pitchFamily="34" charset="-120"/>
+                <a:cs typeface="Heiti TC Light"/>
+              </a:rPr>
+              <a:t>LLM</a:t>
+            </a:r>
+            <a:r>
               <a:rPr kumimoji="1" lang="zh-TW" altLang="en-US" sz="3200" dirty="0">
                 <a:effectLst>
                   <a:outerShdw blurRad="38100" dist="38100" dir="2700000" algn="tl">
@@ -12874,7 +12833,37 @@
                 <a:ea typeface="微軟正黑體" panose="020B0604030504040204" pitchFamily="34" charset="-120"/>
                 <a:cs typeface="Heiti TC Light"/>
               </a:rPr>
-              <a:t>著名大型語言模型</a:t>
+              <a:t>的預訓練</a:t>
+            </a:r>
+            <a:r>
+              <a:rPr kumimoji="1" lang="en-US" altLang="zh-TW" sz="3200" dirty="0">
+                <a:effectLst>
+                  <a:outerShdw blurRad="38100" dist="38100" dir="2700000" algn="tl">
+                    <a:srgbClr val="000000">
+                      <a:alpha val="43137"/>
+                    </a:srgbClr>
+                  </a:outerShdw>
+                </a:effectLst>
+                <a:latin typeface="微軟正黑體" panose="020B0604030504040204" pitchFamily="34" charset="-120"/>
+                <a:ea typeface="微軟正黑體" panose="020B0604030504040204" pitchFamily="34" charset="-120"/>
+                <a:cs typeface="Heiti TC Light"/>
+              </a:rPr>
+              <a:t>+</a:t>
+            </a:r>
+            <a:r>
+              <a:rPr kumimoji="1" lang="zh-TW" altLang="en-US" sz="3200" dirty="0">
+                <a:effectLst>
+                  <a:outerShdw blurRad="38100" dist="38100" dir="2700000" algn="tl">
+                    <a:srgbClr val="000000">
+                      <a:alpha val="43137"/>
+                    </a:srgbClr>
+                  </a:outerShdw>
+                </a:effectLst>
+                <a:latin typeface="微軟正黑體" panose="020B0604030504040204" pitchFamily="34" charset="-120"/>
+                <a:ea typeface="微軟正黑體" panose="020B0604030504040204" pitchFamily="34" charset="-120"/>
+                <a:cs typeface="Heiti TC Light"/>
+              </a:rPr>
+              <a:t>微調</a:t>
             </a:r>
             <a:endParaRPr kumimoji="1" lang="en-US" altLang="zh-TW" sz="3200" dirty="0">
               <a:effectLst>
@@ -12907,8 +12896,35 @@
                 <a:ea typeface="微軟正黑體" panose="020B0604030504040204" pitchFamily="34" charset="-120"/>
                 <a:cs typeface="Heiti TC Light"/>
               </a:rPr>
-              <a:t>Chinchilla Scaling Law</a:t>
-            </a:r>
+              <a:t>LLM</a:t>
+            </a:r>
+            <a:r>
+              <a:rPr kumimoji="1" lang="zh-TW" altLang="en-US" sz="3200" dirty="0">
+                <a:effectLst>
+                  <a:outerShdw blurRad="38100" dist="38100" dir="2700000" algn="tl">
+                    <a:srgbClr val="000000">
+                      <a:alpha val="43137"/>
+                    </a:srgbClr>
+                  </a:outerShdw>
+                </a:effectLst>
+                <a:latin typeface="微軟正黑體" panose="020B0604030504040204" pitchFamily="34" charset="-120"/>
+                <a:ea typeface="微軟正黑體" panose="020B0604030504040204" pitchFamily="34" charset="-120"/>
+                <a:cs typeface="Heiti TC Light"/>
+              </a:rPr>
+              <a:t>從生成進化</a:t>
+            </a:r>
+            <a:endParaRPr kumimoji="1" lang="en-US" altLang="zh-TW" sz="3200" dirty="0">
+              <a:effectLst>
+                <a:outerShdw blurRad="38100" dist="38100" dir="2700000" algn="tl">
+                  <a:srgbClr val="000000">
+                    <a:alpha val="43137"/>
+                  </a:srgbClr>
+                </a:outerShdw>
+              </a:effectLst>
+              <a:latin typeface="微軟正黑體" panose="020B0604030504040204" pitchFamily="34" charset="-120"/>
+              <a:ea typeface="微軟正黑體" panose="020B0604030504040204" pitchFamily="34" charset="-120"/>
+              <a:cs typeface="Heiti TC Light"/>
+            </a:endParaRPr>
           </a:p>
           <a:p>
             <a:pPr marL="361950" indent="-361950">
@@ -12928,7 +12944,91 @@
                 <a:ea typeface="微軟正黑體" panose="020B0604030504040204" pitchFamily="34" charset="-120"/>
                 <a:cs typeface="Heiti TC Light"/>
               </a:rPr>
-              <a:t>Emergent abilities</a:t>
+              <a:t>In-Context Learning</a:t>
+            </a:r>
+          </a:p>
+          <a:p>
+            <a:pPr marL="361950" indent="-361950">
+              <a:buFont typeface="Arial" panose="020B0604020202020204" pitchFamily="34" charset="0"/>
+              <a:buChar char="•"/>
+            </a:pPr>
+            <a:r>
+              <a:rPr kumimoji="1" lang="en-US" altLang="zh-TW" sz="3200" dirty="0">
+                <a:effectLst>
+                  <a:outerShdw blurRad="38100" dist="38100" dir="2700000" algn="tl">
+                    <a:srgbClr val="000000">
+                      <a:alpha val="43137"/>
+                    </a:srgbClr>
+                  </a:outerShdw>
+                </a:effectLst>
+                <a:latin typeface="微軟正黑體" panose="020B0604030504040204" pitchFamily="34" charset="-120"/>
+                <a:ea typeface="微軟正黑體" panose="020B0604030504040204" pitchFamily="34" charset="-120"/>
+                <a:cs typeface="Heiti TC Light"/>
+              </a:rPr>
+              <a:t>NLP</a:t>
+            </a:r>
+            <a:r>
+              <a:rPr kumimoji="1" lang="zh-TW" altLang="en-US" sz="3200" dirty="0">
+                <a:effectLst>
+                  <a:outerShdw blurRad="38100" dist="38100" dir="2700000" algn="tl">
+                    <a:srgbClr val="000000">
+                      <a:alpha val="43137"/>
+                    </a:srgbClr>
+                  </a:outerShdw>
+                </a:effectLst>
+                <a:latin typeface="微軟正黑體" panose="020B0604030504040204" pitchFamily="34" charset="-120"/>
+                <a:ea typeface="微軟正黑體" panose="020B0604030504040204" pitchFamily="34" charset="-120"/>
+                <a:cs typeface="Heiti TC Light"/>
+              </a:rPr>
+              <a:t>任務均為文字生成</a:t>
+            </a:r>
+            <a:endParaRPr kumimoji="1" lang="en-US" altLang="zh-TW" sz="3200" dirty="0">
+              <a:effectLst>
+                <a:outerShdw blurRad="38100" dist="38100" dir="2700000" algn="tl">
+                  <a:srgbClr val="000000">
+                    <a:alpha val="43137"/>
+                  </a:srgbClr>
+                </a:outerShdw>
+              </a:effectLst>
+              <a:latin typeface="微軟正黑體" panose="020B0604030504040204" pitchFamily="34" charset="-120"/>
+              <a:ea typeface="微軟正黑體" panose="020B0604030504040204" pitchFamily="34" charset="-120"/>
+              <a:cs typeface="Heiti TC Light"/>
+            </a:endParaRPr>
+          </a:p>
+          <a:p>
+            <a:pPr marL="361950" indent="-361950">
+              <a:buFont typeface="Arial" panose="020B0604020202020204" pitchFamily="34" charset="0"/>
+              <a:buChar char="•"/>
+            </a:pPr>
+            <a:r>
+              <a:rPr kumimoji="1" lang="en-US" altLang="zh-TW" sz="3200" dirty="0">
+                <a:effectLst>
+                  <a:outerShdw blurRad="38100" dist="38100" dir="2700000" algn="tl">
+                    <a:srgbClr val="000000">
+                      <a:alpha val="43137"/>
+                    </a:srgbClr>
+                  </a:outerShdw>
+                </a:effectLst>
+                <a:latin typeface="微軟正黑體" panose="020B0604030504040204" pitchFamily="34" charset="-120"/>
+                <a:ea typeface="微軟正黑體" panose="020B0604030504040204" pitchFamily="34" charset="-120"/>
+                <a:cs typeface="Heiti TC Light"/>
+              </a:rPr>
+              <a:t>T5/BART</a:t>
+            </a:r>
+            <a:r>
+              <a:rPr kumimoji="1" lang="zh-TW" altLang="en-US" sz="3200" dirty="0">
+                <a:effectLst>
+                  <a:outerShdw blurRad="38100" dist="38100" dir="2700000" algn="tl">
+                    <a:srgbClr val="000000">
+                      <a:alpha val="43137"/>
+                    </a:srgbClr>
+                  </a:outerShdw>
+                </a:effectLst>
+                <a:latin typeface="微軟正黑體" panose="020B0604030504040204" pitchFamily="34" charset="-120"/>
+                <a:ea typeface="微軟正黑體" panose="020B0604030504040204" pitchFamily="34" charset="-120"/>
+                <a:cs typeface="Heiti TC Light"/>
+              </a:rPr>
+              <a:t>模型</a:t>
             </a:r>
           </a:p>
           <a:p>
@@ -12949,6 +13049,42 @@
               <a:cs typeface="Heiti TC Light"/>
             </a:endParaRPr>
           </a:p>
+          <a:p>
+            <a:pPr marL="361950" indent="-361950">
+              <a:buFont typeface="Arial" panose="020B0604020202020204" pitchFamily="34" charset="0"/>
+              <a:buChar char="•"/>
+            </a:pPr>
+            <a:endParaRPr kumimoji="1" lang="zh-TW" altLang="en-US" sz="3200" dirty="0">
+              <a:effectLst>
+                <a:outerShdw blurRad="38100" dist="38100" dir="2700000" algn="tl">
+                  <a:srgbClr val="000000">
+                    <a:alpha val="43137"/>
+                  </a:srgbClr>
+                </a:outerShdw>
+              </a:effectLst>
+              <a:latin typeface="微軟正黑體" panose="020B0604030504040204" pitchFamily="34" charset="-120"/>
+              <a:ea typeface="微軟正黑體" panose="020B0604030504040204" pitchFamily="34" charset="-120"/>
+              <a:cs typeface="Heiti TC Light"/>
+            </a:endParaRPr>
+          </a:p>
+          <a:p>
+            <a:pPr marL="361950" indent="-361950">
+              <a:buFont typeface="Arial" panose="020B0604020202020204" pitchFamily="34" charset="0"/>
+              <a:buChar char="•"/>
+            </a:pPr>
+            <a:endParaRPr kumimoji="1" lang="en-US" altLang="zh-TW" sz="3200" dirty="0">
+              <a:effectLst>
+                <a:outerShdw blurRad="38100" dist="38100" dir="2700000" algn="tl">
+                  <a:srgbClr val="000000">
+                    <a:alpha val="43137"/>
+                  </a:srgbClr>
+                </a:outerShdw>
+              </a:effectLst>
+              <a:latin typeface="微軟正黑體" panose="020B0604030504040204" pitchFamily="34" charset="-120"/>
+              <a:ea typeface="微軟正黑體" panose="020B0604030504040204" pitchFamily="34" charset="-120"/>
+              <a:cs typeface="Heiti TC Light"/>
+            </a:endParaRPr>
+          </a:p>
         </p:txBody>
       </p:sp>
       <p:sp>
@@ -12961,8 +13097,8 @@
         </p:nvSpPr>
         <p:spPr>
           <a:xfrm>
-            <a:off x="2095500" y="304800"/>
-            <a:ext cx="5257800" cy="990600"/>
+            <a:off x="1066800" y="304800"/>
+            <a:ext cx="7162800" cy="990600"/>
           </a:xfrm>
           <a:prstGeom prst="rect">
             <a:avLst/>
@@ -13035,7 +13171,7 @@
                 <a:ea typeface="微軟正黑體" panose="020B0604030504040204" pitchFamily="34" charset="-120"/>
                 <a:cs typeface="+mn-cs"/>
               </a:rPr>
-              <a:t>大型語言模型</a:t>
+              <a:t>大型語言模型的進化</a:t>
             </a:r>
           </a:p>
         </p:txBody>
@@ -13043,7 +13179,7 @@
     </p:spTree>
     <p:extLst>
       <p:ext uri="{BB962C8B-B14F-4D97-AF65-F5344CB8AC3E}">
-        <p14:creationId xmlns:p14="http://schemas.microsoft.com/office/powerpoint/2010/main" val="3882104353"/>
+        <p14:creationId xmlns:p14="http://schemas.microsoft.com/office/powerpoint/2010/main" val="2525067240"/>
       </p:ext>
     </p:extLst>
   </p:cSld>
@@ -13082,7 +13218,7 @@
         <p:spPr>
           <a:xfrm>
             <a:off x="685800" y="1676400"/>
-            <a:ext cx="8077200" cy="5016758"/>
+            <a:ext cx="8077200" cy="4524315"/>
           </a:xfrm>
           <a:prstGeom prst="rect">
             <a:avLst/>
@@ -13094,6 +13230,27 @@
             <a:spAutoFit/>
           </a:bodyPr>
           <a:lstStyle/>
+          <a:p>
+            <a:pPr marL="361950" indent="-361950">
+              <a:buFont typeface="Arial" panose="020B0604020202020204" pitchFamily="34" charset="0"/>
+              <a:buChar char="•"/>
+            </a:pPr>
+            <a:r>
+              <a:rPr kumimoji="1" lang="en-US" altLang="zh-TW" sz="3200" dirty="0">
+                <a:effectLst>
+                  <a:outerShdw blurRad="38100" dist="38100" dir="2700000" algn="tl">
+                    <a:srgbClr val="000000">
+                      <a:alpha val="43137"/>
+                    </a:srgbClr>
+                  </a:outerShdw>
+                </a:effectLst>
+                <a:latin typeface="微軟正黑體" panose="020B0604030504040204" pitchFamily="34" charset="-120"/>
+                <a:ea typeface="微軟正黑體" panose="020B0604030504040204" pitchFamily="34" charset="-120"/>
+                <a:cs typeface="Heiti TC Light"/>
+              </a:rPr>
+              <a:t>Learning In-context Learning</a:t>
+            </a:r>
+          </a:p>
           <a:p>
             <a:pPr marL="361950" indent="-361950">
               <a:buFont typeface="Arial" panose="020B0604020202020204" pitchFamily="34" charset="0"/>
@@ -13112,7 +13269,109 @@
                 <a:ea typeface="微軟正黑體" panose="020B0604030504040204" pitchFamily="34" charset="-120"/>
                 <a:cs typeface="Heiti TC Light"/>
               </a:rPr>
-              <a:t>大型語言模型的進化</a:t>
+              <a:t>讓</a:t>
+            </a:r>
+            <a:r>
+              <a:rPr kumimoji="1" lang="en-US" altLang="zh-TW" sz="3200" dirty="0">
+                <a:effectLst>
+                  <a:outerShdw blurRad="38100" dist="38100" dir="2700000" algn="tl">
+                    <a:srgbClr val="000000">
+                      <a:alpha val="43137"/>
+                    </a:srgbClr>
+                  </a:outerShdw>
+                </a:effectLst>
+                <a:latin typeface="微軟正黑體" panose="020B0604030504040204" pitchFamily="34" charset="-120"/>
+                <a:ea typeface="微軟正黑體" panose="020B0604030504040204" pitchFamily="34" charset="-120"/>
+                <a:cs typeface="Heiti TC Light"/>
+              </a:rPr>
+              <a:t>LLM</a:t>
+            </a:r>
+            <a:r>
+              <a:rPr kumimoji="1" lang="zh-TW" altLang="en-US" sz="3200" dirty="0">
+                <a:effectLst>
+                  <a:outerShdw blurRad="38100" dist="38100" dir="2700000" algn="tl">
+                    <a:srgbClr val="000000">
+                      <a:alpha val="43137"/>
+                    </a:srgbClr>
+                  </a:outerShdw>
+                </a:effectLst>
+                <a:latin typeface="微軟正黑體" panose="020B0604030504040204" pitchFamily="34" charset="-120"/>
+                <a:ea typeface="微軟正黑體" panose="020B0604030504040204" pitchFamily="34" charset="-120"/>
+                <a:cs typeface="Heiti TC Light"/>
+              </a:rPr>
+              <a:t>看懂指令並回答</a:t>
+            </a:r>
+          </a:p>
+          <a:p>
+            <a:pPr marL="361950" indent="-361950">
+              <a:buFont typeface="Arial" panose="020B0604020202020204" pitchFamily="34" charset="0"/>
+              <a:buChar char="•"/>
+            </a:pPr>
+            <a:r>
+              <a:rPr kumimoji="1" lang="en-US" altLang="zh-TW" sz="3200" dirty="0">
+                <a:effectLst>
+                  <a:outerShdw blurRad="38100" dist="38100" dir="2700000" algn="tl">
+                    <a:srgbClr val="000000">
+                      <a:alpha val="43137"/>
+                    </a:srgbClr>
+                  </a:outerShdw>
+                </a:effectLst>
+                <a:latin typeface="微軟正黑體" panose="020B0604030504040204" pitchFamily="34" charset="-120"/>
+                <a:ea typeface="微軟正黑體" panose="020B0604030504040204" pitchFamily="34" charset="-120"/>
+                <a:cs typeface="Heiti TC Light"/>
+              </a:rPr>
+              <a:t>Instruction tuning</a:t>
+            </a:r>
+          </a:p>
+          <a:p>
+            <a:pPr marL="361950" indent="-361950">
+              <a:buFont typeface="Arial" panose="020B0604020202020204" pitchFamily="34" charset="0"/>
+              <a:buChar char="•"/>
+            </a:pPr>
+            <a:r>
+              <a:rPr kumimoji="1" lang="zh-TW" altLang="en-US" sz="3200" dirty="0">
+                <a:effectLst>
+                  <a:outerShdw blurRad="38100" dist="38100" dir="2700000" algn="tl">
+                    <a:srgbClr val="000000">
+                      <a:alpha val="43137"/>
+                    </a:srgbClr>
+                  </a:outerShdw>
+                </a:effectLst>
+                <a:latin typeface="微軟正黑體" panose="020B0604030504040204" pitchFamily="34" charset="-120"/>
+                <a:ea typeface="微軟正黑體" panose="020B0604030504040204" pitchFamily="34" charset="-120"/>
+                <a:cs typeface="Heiti TC Light"/>
+              </a:rPr>
+              <a:t>產生下個字</a:t>
+            </a:r>
+            <a:r>
+              <a:rPr kumimoji="1" lang="en-US" altLang="zh-TW" sz="3200" dirty="0">
+                <a:effectLst>
+                  <a:outerShdw blurRad="38100" dist="38100" dir="2700000" algn="tl">
+                    <a:srgbClr val="000000">
+                      <a:alpha val="43137"/>
+                    </a:srgbClr>
+                  </a:outerShdw>
+                </a:effectLst>
+                <a:latin typeface="微軟正黑體" panose="020B0604030504040204" pitchFamily="34" charset="-120"/>
+                <a:ea typeface="微軟正黑體" panose="020B0604030504040204" pitchFamily="34" charset="-120"/>
+                <a:cs typeface="Heiti TC Light"/>
+              </a:rPr>
+              <a:t>vs.</a:t>
+            </a:r>
+            <a:r>
+              <a:rPr kumimoji="1" lang="zh-TW" altLang="en-US" sz="3200" dirty="0">
+                <a:effectLst>
+                  <a:outerShdw blurRad="38100" dist="38100" dir="2700000" algn="tl">
+                    <a:srgbClr val="000000">
+                      <a:alpha val="43137"/>
+                    </a:srgbClr>
+                  </a:outerShdw>
+                </a:effectLst>
+                <a:latin typeface="微軟正黑體" panose="020B0604030504040204" pitchFamily="34" charset="-120"/>
+                <a:ea typeface="微軟正黑體" panose="020B0604030504040204" pitchFamily="34" charset="-120"/>
+                <a:cs typeface="Heiti TC Light"/>
+              </a:rPr>
+              <a:t>看懂指令</a:t>
             </a:r>
             <a:endParaRPr kumimoji="1" lang="en-US" altLang="zh-TW" sz="3200" dirty="0">
               <a:effectLst>
@@ -13133,6 +13392,21 @@
               <a:buChar char="•"/>
             </a:pPr>
             <a:r>
+              <a:rPr kumimoji="1" lang="en-US" altLang="zh-TW" sz="3200" dirty="0">
+                <a:effectLst>
+                  <a:outerShdw blurRad="38100" dist="38100" dir="2700000" algn="tl">
+                    <a:srgbClr val="000000">
+                      <a:alpha val="43137"/>
+                    </a:srgbClr>
+                  </a:outerShdw>
+                </a:effectLst>
+                <a:latin typeface="微軟正黑體" panose="020B0604030504040204" pitchFamily="34" charset="-120"/>
+                <a:ea typeface="微軟正黑體" panose="020B0604030504040204" pitchFamily="34" charset="-120"/>
+                <a:cs typeface="Heiti TC Light"/>
+              </a:rPr>
+              <a:t>Chain of thoughts</a:t>
+            </a:r>
+            <a:r>
               <a:rPr kumimoji="1" lang="zh-TW" altLang="en-US" sz="3200" dirty="0">
                 <a:effectLst>
                   <a:outerShdw blurRad="38100" dist="38100" dir="2700000" algn="tl">
@@ -13145,8 +13419,14 @@
                 <a:ea typeface="微軟正黑體" panose="020B0604030504040204" pitchFamily="34" charset="-120"/>
                 <a:cs typeface="Heiti TC Light"/>
               </a:rPr>
-              <a:t>生成式模型</a:t>
-            </a:r>
+              <a:t>思維鍊</a:t>
+            </a:r>
+          </a:p>
+          <a:p>
+            <a:pPr marL="361950" indent="-361950">
+              <a:buFont typeface="Arial" panose="020B0604020202020204" pitchFamily="34" charset="0"/>
+              <a:buChar char="•"/>
+            </a:pPr>
             <a:endParaRPr kumimoji="1" lang="en-US" altLang="zh-TW" sz="3200" dirty="0">
               <a:effectLst>
                 <a:outerShdw blurRad="38100" dist="38100" dir="2700000" algn="tl">
@@ -13159,237 +13439,6 @@
               <a:ea typeface="微軟正黑體" panose="020B0604030504040204" pitchFamily="34" charset="-120"/>
               <a:cs typeface="Heiti TC Light"/>
             </a:endParaRPr>
-          </a:p>
-          <a:p>
-            <a:pPr marL="361950" indent="-361950">
-              <a:buFont typeface="Arial" panose="020B0604020202020204" pitchFamily="34" charset="0"/>
-              <a:buChar char="•"/>
-            </a:pPr>
-            <a:r>
-              <a:rPr kumimoji="1" lang="en-US" altLang="zh-TW" sz="3200" dirty="0">
-                <a:effectLst>
-                  <a:outerShdw blurRad="38100" dist="38100" dir="2700000" algn="tl">
-                    <a:srgbClr val="000000">
-                      <a:alpha val="43137"/>
-                    </a:srgbClr>
-                  </a:outerShdw>
-                </a:effectLst>
-                <a:latin typeface="微軟正黑體" panose="020B0604030504040204" pitchFamily="34" charset="-120"/>
-                <a:ea typeface="微軟正黑體" panose="020B0604030504040204" pitchFamily="34" charset="-120"/>
-                <a:cs typeface="Heiti TC Light"/>
-              </a:rPr>
-              <a:t>LLM</a:t>
-            </a:r>
-            <a:r>
-              <a:rPr kumimoji="1" lang="zh-TW" altLang="en-US" sz="3200" dirty="0">
-                <a:effectLst>
-                  <a:outerShdw blurRad="38100" dist="38100" dir="2700000" algn="tl">
-                    <a:srgbClr val="000000">
-                      <a:alpha val="43137"/>
-                    </a:srgbClr>
-                  </a:outerShdw>
-                </a:effectLst>
-                <a:latin typeface="微軟正黑體" panose="020B0604030504040204" pitchFamily="34" charset="-120"/>
-                <a:ea typeface="微軟正黑體" panose="020B0604030504040204" pitchFamily="34" charset="-120"/>
-                <a:cs typeface="Heiti TC Light"/>
-              </a:rPr>
-              <a:t>的預訓練</a:t>
-            </a:r>
-            <a:r>
-              <a:rPr kumimoji="1" lang="en-US" altLang="zh-TW" sz="3200" dirty="0">
-                <a:effectLst>
-                  <a:outerShdw blurRad="38100" dist="38100" dir="2700000" algn="tl">
-                    <a:srgbClr val="000000">
-                      <a:alpha val="43137"/>
-                    </a:srgbClr>
-                  </a:outerShdw>
-                </a:effectLst>
-                <a:latin typeface="微軟正黑體" panose="020B0604030504040204" pitchFamily="34" charset="-120"/>
-                <a:ea typeface="微軟正黑體" panose="020B0604030504040204" pitchFamily="34" charset="-120"/>
-                <a:cs typeface="Heiti TC Light"/>
-              </a:rPr>
-              <a:t>+</a:t>
-            </a:r>
-            <a:r>
-              <a:rPr kumimoji="1" lang="zh-TW" altLang="en-US" sz="3200" dirty="0">
-                <a:effectLst>
-                  <a:outerShdw blurRad="38100" dist="38100" dir="2700000" algn="tl">
-                    <a:srgbClr val="000000">
-                      <a:alpha val="43137"/>
-                    </a:srgbClr>
-                  </a:outerShdw>
-                </a:effectLst>
-                <a:latin typeface="微軟正黑體" panose="020B0604030504040204" pitchFamily="34" charset="-120"/>
-                <a:ea typeface="微軟正黑體" panose="020B0604030504040204" pitchFamily="34" charset="-120"/>
-                <a:cs typeface="Heiti TC Light"/>
-              </a:rPr>
-              <a:t>微調</a:t>
-            </a:r>
-            <a:endParaRPr kumimoji="1" lang="en-US" altLang="zh-TW" sz="3200" dirty="0">
-              <a:effectLst>
-                <a:outerShdw blurRad="38100" dist="38100" dir="2700000" algn="tl">
-                  <a:srgbClr val="000000">
-                    <a:alpha val="43137"/>
-                  </a:srgbClr>
-                </a:outerShdw>
-              </a:effectLst>
-              <a:latin typeface="微軟正黑體" panose="020B0604030504040204" pitchFamily="34" charset="-120"/>
-              <a:ea typeface="微軟正黑體" panose="020B0604030504040204" pitchFamily="34" charset="-120"/>
-              <a:cs typeface="Heiti TC Light"/>
-            </a:endParaRPr>
-          </a:p>
-          <a:p>
-            <a:pPr marL="361950" indent="-361950">
-              <a:buFont typeface="Arial" panose="020B0604020202020204" pitchFamily="34" charset="0"/>
-              <a:buChar char="•"/>
-            </a:pPr>
-            <a:r>
-              <a:rPr kumimoji="1" lang="en-US" altLang="zh-TW" sz="3200" dirty="0">
-                <a:effectLst>
-                  <a:outerShdw blurRad="38100" dist="38100" dir="2700000" algn="tl">
-                    <a:srgbClr val="000000">
-                      <a:alpha val="43137"/>
-                    </a:srgbClr>
-                  </a:outerShdw>
-                </a:effectLst>
-                <a:latin typeface="微軟正黑體" panose="020B0604030504040204" pitchFamily="34" charset="-120"/>
-                <a:ea typeface="微軟正黑體" panose="020B0604030504040204" pitchFamily="34" charset="-120"/>
-                <a:cs typeface="Heiti TC Light"/>
-              </a:rPr>
-              <a:t>LLM</a:t>
-            </a:r>
-            <a:r>
-              <a:rPr kumimoji="1" lang="zh-TW" altLang="en-US" sz="3200" dirty="0">
-                <a:effectLst>
-                  <a:outerShdw blurRad="38100" dist="38100" dir="2700000" algn="tl">
-                    <a:srgbClr val="000000">
-                      <a:alpha val="43137"/>
-                    </a:srgbClr>
-                  </a:outerShdw>
-                </a:effectLst>
-                <a:latin typeface="微軟正黑體" panose="020B0604030504040204" pitchFamily="34" charset="-120"/>
-                <a:ea typeface="微軟正黑體" panose="020B0604030504040204" pitchFamily="34" charset="-120"/>
-                <a:cs typeface="Heiti TC Light"/>
-              </a:rPr>
-              <a:t>從生成進化</a:t>
-            </a:r>
-            <a:endParaRPr kumimoji="1" lang="en-US" altLang="zh-TW" sz="3200" dirty="0">
-              <a:effectLst>
-                <a:outerShdw blurRad="38100" dist="38100" dir="2700000" algn="tl">
-                  <a:srgbClr val="000000">
-                    <a:alpha val="43137"/>
-                  </a:srgbClr>
-                </a:outerShdw>
-              </a:effectLst>
-              <a:latin typeface="微軟正黑體" panose="020B0604030504040204" pitchFamily="34" charset="-120"/>
-              <a:ea typeface="微軟正黑體" panose="020B0604030504040204" pitchFamily="34" charset="-120"/>
-              <a:cs typeface="Heiti TC Light"/>
-            </a:endParaRPr>
-          </a:p>
-          <a:p>
-            <a:pPr marL="361950" indent="-361950">
-              <a:buFont typeface="Arial" panose="020B0604020202020204" pitchFamily="34" charset="0"/>
-              <a:buChar char="•"/>
-            </a:pPr>
-            <a:r>
-              <a:rPr kumimoji="1" lang="en-US" altLang="zh-TW" sz="3200" dirty="0">
-                <a:effectLst>
-                  <a:outerShdw blurRad="38100" dist="38100" dir="2700000" algn="tl">
-                    <a:srgbClr val="000000">
-                      <a:alpha val="43137"/>
-                    </a:srgbClr>
-                  </a:outerShdw>
-                </a:effectLst>
-                <a:latin typeface="微軟正黑體" panose="020B0604030504040204" pitchFamily="34" charset="-120"/>
-                <a:ea typeface="微軟正黑體" panose="020B0604030504040204" pitchFamily="34" charset="-120"/>
-                <a:cs typeface="Heiti TC Light"/>
-              </a:rPr>
-              <a:t>In-Context Learning</a:t>
-            </a:r>
-          </a:p>
-          <a:p>
-            <a:pPr marL="361950" indent="-361950">
-              <a:buFont typeface="Arial" panose="020B0604020202020204" pitchFamily="34" charset="0"/>
-              <a:buChar char="•"/>
-            </a:pPr>
-            <a:r>
-              <a:rPr kumimoji="1" lang="en-US" altLang="zh-TW" sz="3200" dirty="0">
-                <a:effectLst>
-                  <a:outerShdw blurRad="38100" dist="38100" dir="2700000" algn="tl">
-                    <a:srgbClr val="000000">
-                      <a:alpha val="43137"/>
-                    </a:srgbClr>
-                  </a:outerShdw>
-                </a:effectLst>
-                <a:latin typeface="微軟正黑體" panose="020B0604030504040204" pitchFamily="34" charset="-120"/>
-                <a:ea typeface="微軟正黑體" panose="020B0604030504040204" pitchFamily="34" charset="-120"/>
-                <a:cs typeface="Heiti TC Light"/>
-              </a:rPr>
-              <a:t>NLP</a:t>
-            </a:r>
-            <a:r>
-              <a:rPr kumimoji="1" lang="zh-TW" altLang="en-US" sz="3200" dirty="0">
-                <a:effectLst>
-                  <a:outerShdw blurRad="38100" dist="38100" dir="2700000" algn="tl">
-                    <a:srgbClr val="000000">
-                      <a:alpha val="43137"/>
-                    </a:srgbClr>
-                  </a:outerShdw>
-                </a:effectLst>
-                <a:latin typeface="微軟正黑體" panose="020B0604030504040204" pitchFamily="34" charset="-120"/>
-                <a:ea typeface="微軟正黑體" panose="020B0604030504040204" pitchFamily="34" charset="-120"/>
-                <a:cs typeface="Heiti TC Light"/>
-              </a:rPr>
-              <a:t>任務均為文字生成</a:t>
-            </a:r>
-            <a:endParaRPr kumimoji="1" lang="en-US" altLang="zh-TW" sz="3200" dirty="0">
-              <a:effectLst>
-                <a:outerShdw blurRad="38100" dist="38100" dir="2700000" algn="tl">
-                  <a:srgbClr val="000000">
-                    <a:alpha val="43137"/>
-                  </a:srgbClr>
-                </a:outerShdw>
-              </a:effectLst>
-              <a:latin typeface="微軟正黑體" panose="020B0604030504040204" pitchFamily="34" charset="-120"/>
-              <a:ea typeface="微軟正黑體" panose="020B0604030504040204" pitchFamily="34" charset="-120"/>
-              <a:cs typeface="Heiti TC Light"/>
-            </a:endParaRPr>
-          </a:p>
-          <a:p>
-            <a:pPr marL="361950" indent="-361950">
-              <a:buFont typeface="Arial" panose="020B0604020202020204" pitchFamily="34" charset="0"/>
-              <a:buChar char="•"/>
-            </a:pPr>
-            <a:r>
-              <a:rPr kumimoji="1" lang="en-US" altLang="zh-TW" sz="3200" dirty="0">
-                <a:effectLst>
-                  <a:outerShdw blurRad="38100" dist="38100" dir="2700000" algn="tl">
-                    <a:srgbClr val="000000">
-                      <a:alpha val="43137"/>
-                    </a:srgbClr>
-                  </a:outerShdw>
-                </a:effectLst>
-                <a:latin typeface="微軟正黑體" panose="020B0604030504040204" pitchFamily="34" charset="-120"/>
-                <a:ea typeface="微軟正黑體" panose="020B0604030504040204" pitchFamily="34" charset="-120"/>
-                <a:cs typeface="Heiti TC Light"/>
-              </a:rPr>
-              <a:t>T5/BART</a:t>
-            </a:r>
-            <a:r>
-              <a:rPr kumimoji="1" lang="zh-TW" altLang="en-US" sz="3200" dirty="0">
-                <a:effectLst>
-                  <a:outerShdw blurRad="38100" dist="38100" dir="2700000" algn="tl">
-                    <a:srgbClr val="000000">
-                      <a:alpha val="43137"/>
-                    </a:srgbClr>
-                  </a:outerShdw>
-                </a:effectLst>
-                <a:latin typeface="微軟正黑體" panose="020B0604030504040204" pitchFamily="34" charset="-120"/>
-                <a:ea typeface="微軟正黑體" panose="020B0604030504040204" pitchFamily="34" charset="-120"/>
-                <a:cs typeface="Heiti TC Light"/>
-              </a:rPr>
-              <a:t>模型</a:t>
-            </a:r>
           </a:p>
           <a:p>
             <a:pPr marL="361950" indent="-361950">
@@ -13508,38 +13557,35 @@
                 <a:ea typeface="微軟正黑體" panose="020B0604030504040204" pitchFamily="34" charset="-120"/>
                 <a:cs typeface="+mn-cs"/>
               </a:rPr>
-              <a:t>14. </a:t>
-            </a:r>
-            <a:r>
-              <a:rPr kumimoji="0" lang="zh-TW" altLang="en-US" sz="4800" b="1" i="0" u="none" strike="noStrike" kern="0" cap="none" spc="0" normalizeH="0" baseline="0" noProof="0" dirty="0">
-                <a:ln>
-                  <a:noFill/>
-                </a:ln>
-                <a:solidFill>
-                  <a:srgbClr val="00B0F0"/>
-                </a:solidFill>
-                <a:effectLst>
-                  <a:outerShdw blurRad="38100" dist="38100" dir="2700000" algn="tl">
-                    <a:srgbClr val="000000">
-                      <a:alpha val="43137"/>
-                    </a:srgbClr>
-                  </a:outerShdw>
-                </a:effectLst>
-                <a:uLnTx/>
-                <a:uFillTx/>
-                <a:latin typeface="微軟正黑體" panose="020B0604030504040204" pitchFamily="34" charset="-120"/>
-                <a:ea typeface="微軟正黑體" panose="020B0604030504040204" pitchFamily="34" charset="-120"/>
-                <a:cs typeface="+mn-cs"/>
-              </a:rPr>
-              <a:t>大型語言模型的進化</a:t>
-            </a:r>
+              <a:t>14. Instruction Tuning</a:t>
+            </a:r>
+            <a:endParaRPr kumimoji="0" lang="zh-TW" altLang="en-US" sz="4800" b="1" i="0" u="none" strike="noStrike" kern="0" cap="none" spc="0" normalizeH="0" baseline="0" noProof="0" dirty="0">
+              <a:ln>
+                <a:noFill/>
+              </a:ln>
+              <a:solidFill>
+                <a:srgbClr val="00B0F0"/>
+              </a:solidFill>
+              <a:effectLst>
+                <a:outerShdw blurRad="38100" dist="38100" dir="2700000" algn="tl">
+                  <a:srgbClr val="000000">
+                    <a:alpha val="43137"/>
+                  </a:srgbClr>
+                </a:outerShdw>
+              </a:effectLst>
+              <a:uLnTx/>
+              <a:uFillTx/>
+              <a:latin typeface="微軟正黑體" panose="020B0604030504040204" pitchFamily="34" charset="-120"/>
+              <a:ea typeface="微軟正黑體" panose="020B0604030504040204" pitchFamily="34" charset="-120"/>
+              <a:cs typeface="+mn-cs"/>
+            </a:endParaRPr>
           </a:p>
         </p:txBody>
       </p:sp>
     </p:spTree>
     <p:extLst>
       <p:ext uri="{BB962C8B-B14F-4D97-AF65-F5344CB8AC3E}">
-        <p14:creationId xmlns:p14="http://schemas.microsoft.com/office/powerpoint/2010/main" val="2525067240"/>
+        <p14:creationId xmlns:p14="http://schemas.microsoft.com/office/powerpoint/2010/main" val="2700486613"/>
       </p:ext>
     </p:extLst>
   </p:cSld>
@@ -13596,27 +13642,6 @@
               <a:buChar char="•"/>
             </a:pPr>
             <a:r>
-              <a:rPr kumimoji="1" lang="en-US" altLang="zh-TW" sz="3200" dirty="0">
-                <a:effectLst>
-                  <a:outerShdw blurRad="38100" dist="38100" dir="2700000" algn="tl">
-                    <a:srgbClr val="000000">
-                      <a:alpha val="43137"/>
-                    </a:srgbClr>
-                  </a:outerShdw>
-                </a:effectLst>
-                <a:latin typeface="微軟正黑體" panose="020B0604030504040204" pitchFamily="34" charset="-120"/>
-                <a:ea typeface="微軟正黑體" panose="020B0604030504040204" pitchFamily="34" charset="-120"/>
-                <a:cs typeface="Heiti TC Light"/>
-              </a:rPr>
-              <a:t>Learning In-context Learning</a:t>
-            </a:r>
-          </a:p>
-          <a:p>
-            <a:pPr marL="361950" indent="-361950">
-              <a:buFont typeface="Arial" panose="020B0604020202020204" pitchFamily="34" charset="0"/>
-              <a:buChar char="•"/>
-            </a:pPr>
-            <a:r>
               <a:rPr kumimoji="1" lang="zh-TW" altLang="en-US" sz="3200" dirty="0">
                 <a:effectLst>
                   <a:outerShdw blurRad="38100" dist="38100" dir="2700000" algn="tl">
@@ -13629,109 +13654,7 @@
                 <a:ea typeface="微軟正黑體" panose="020B0604030504040204" pitchFamily="34" charset="-120"/>
                 <a:cs typeface="Heiti TC Light"/>
               </a:rPr>
-              <a:t>讓</a:t>
-            </a:r>
-            <a:r>
-              <a:rPr kumimoji="1" lang="en-US" altLang="zh-TW" sz="3200" dirty="0">
-                <a:effectLst>
-                  <a:outerShdw blurRad="38100" dist="38100" dir="2700000" algn="tl">
-                    <a:srgbClr val="000000">
-                      <a:alpha val="43137"/>
-                    </a:srgbClr>
-                  </a:outerShdw>
-                </a:effectLst>
-                <a:latin typeface="微軟正黑體" panose="020B0604030504040204" pitchFamily="34" charset="-120"/>
-                <a:ea typeface="微軟正黑體" panose="020B0604030504040204" pitchFamily="34" charset="-120"/>
-                <a:cs typeface="Heiti TC Light"/>
-              </a:rPr>
-              <a:t>LLM</a:t>
-            </a:r>
-            <a:r>
-              <a:rPr kumimoji="1" lang="zh-TW" altLang="en-US" sz="3200" dirty="0">
-                <a:effectLst>
-                  <a:outerShdw blurRad="38100" dist="38100" dir="2700000" algn="tl">
-                    <a:srgbClr val="000000">
-                      <a:alpha val="43137"/>
-                    </a:srgbClr>
-                  </a:outerShdw>
-                </a:effectLst>
-                <a:latin typeface="微軟正黑體" panose="020B0604030504040204" pitchFamily="34" charset="-120"/>
-                <a:ea typeface="微軟正黑體" panose="020B0604030504040204" pitchFamily="34" charset="-120"/>
-                <a:cs typeface="Heiti TC Light"/>
-              </a:rPr>
-              <a:t>看懂指令並回答</a:t>
-            </a:r>
-          </a:p>
-          <a:p>
-            <a:pPr marL="361950" indent="-361950">
-              <a:buFont typeface="Arial" panose="020B0604020202020204" pitchFamily="34" charset="0"/>
-              <a:buChar char="•"/>
-            </a:pPr>
-            <a:r>
-              <a:rPr kumimoji="1" lang="en-US" altLang="zh-TW" sz="3200" dirty="0">
-                <a:effectLst>
-                  <a:outerShdw blurRad="38100" dist="38100" dir="2700000" algn="tl">
-                    <a:srgbClr val="000000">
-                      <a:alpha val="43137"/>
-                    </a:srgbClr>
-                  </a:outerShdw>
-                </a:effectLst>
-                <a:latin typeface="微軟正黑體" panose="020B0604030504040204" pitchFamily="34" charset="-120"/>
-                <a:ea typeface="微軟正黑體" panose="020B0604030504040204" pitchFamily="34" charset="-120"/>
-                <a:cs typeface="Heiti TC Light"/>
-              </a:rPr>
-              <a:t>Instruction tuning</a:t>
-            </a:r>
-          </a:p>
-          <a:p>
-            <a:pPr marL="361950" indent="-361950">
-              <a:buFont typeface="Arial" panose="020B0604020202020204" pitchFamily="34" charset="0"/>
-              <a:buChar char="•"/>
-            </a:pPr>
-            <a:r>
-              <a:rPr kumimoji="1" lang="zh-TW" altLang="en-US" sz="3200" dirty="0">
-                <a:effectLst>
-                  <a:outerShdw blurRad="38100" dist="38100" dir="2700000" algn="tl">
-                    <a:srgbClr val="000000">
-                      <a:alpha val="43137"/>
-                    </a:srgbClr>
-                  </a:outerShdw>
-                </a:effectLst>
-                <a:latin typeface="微軟正黑體" panose="020B0604030504040204" pitchFamily="34" charset="-120"/>
-                <a:ea typeface="微軟正黑體" panose="020B0604030504040204" pitchFamily="34" charset="-120"/>
-                <a:cs typeface="Heiti TC Light"/>
-              </a:rPr>
-              <a:t>產生下個字</a:t>
-            </a:r>
-            <a:r>
-              <a:rPr kumimoji="1" lang="en-US" altLang="zh-TW" sz="3200" dirty="0">
-                <a:effectLst>
-                  <a:outerShdw blurRad="38100" dist="38100" dir="2700000" algn="tl">
-                    <a:srgbClr val="000000">
-                      <a:alpha val="43137"/>
-                    </a:srgbClr>
-                  </a:outerShdw>
-                </a:effectLst>
-                <a:latin typeface="微軟正黑體" panose="020B0604030504040204" pitchFamily="34" charset="-120"/>
-                <a:ea typeface="微軟正黑體" panose="020B0604030504040204" pitchFamily="34" charset="-120"/>
-                <a:cs typeface="Heiti TC Light"/>
-              </a:rPr>
-              <a:t>vs.</a:t>
-            </a:r>
-            <a:r>
-              <a:rPr kumimoji="1" lang="zh-TW" altLang="en-US" sz="3200" dirty="0">
-                <a:effectLst>
-                  <a:outerShdw blurRad="38100" dist="38100" dir="2700000" algn="tl">
-                    <a:srgbClr val="000000">
-                      <a:alpha val="43137"/>
-                    </a:srgbClr>
-                  </a:outerShdw>
-                </a:effectLst>
-                <a:latin typeface="微軟正黑體" panose="020B0604030504040204" pitchFamily="34" charset="-120"/>
-                <a:ea typeface="微軟正黑體" panose="020B0604030504040204" pitchFamily="34" charset="-120"/>
-                <a:cs typeface="Heiti TC Light"/>
-              </a:rPr>
-              <a:t>看懂指令</a:t>
+              <a:t>只是聽指令而已嗎？</a:t>
             </a:r>
             <a:endParaRPr kumimoji="1" lang="en-US" altLang="zh-TW" sz="3200" dirty="0">
               <a:effectLst>
@@ -13752,6 +13675,21 @@
               <a:buChar char="•"/>
             </a:pPr>
             <a:r>
+              <a:rPr kumimoji="1" lang="zh-TW" altLang="en-US" sz="3200" dirty="0">
+                <a:effectLst>
+                  <a:outerShdw blurRad="38100" dist="38100" dir="2700000" algn="tl">
+                    <a:srgbClr val="000000">
+                      <a:alpha val="43137"/>
+                    </a:srgbClr>
+                  </a:outerShdw>
+                </a:effectLst>
+                <a:latin typeface="微軟正黑體" panose="020B0604030504040204" pitchFamily="34" charset="-120"/>
+                <a:ea typeface="微軟正黑體" panose="020B0604030504040204" pitchFamily="34" charset="-120"/>
+                <a:cs typeface="Heiti TC Light"/>
+              </a:rPr>
+              <a:t>經過之後</a:t>
+            </a:r>
+            <a:r>
               <a:rPr kumimoji="1" lang="en-US" altLang="zh-TW" sz="3200" dirty="0">
                 <a:effectLst>
                   <a:outerShdw blurRad="38100" dist="38100" dir="2700000" algn="tl">
@@ -13764,7 +13702,7 @@
                 <a:ea typeface="微軟正黑體" panose="020B0604030504040204" pitchFamily="34" charset="-120"/>
                 <a:cs typeface="Heiti TC Light"/>
               </a:rPr>
-              <a:t>Chain of thoughts</a:t>
+              <a:t>SFT</a:t>
             </a:r>
             <a:r>
               <a:rPr kumimoji="1" lang="zh-TW" altLang="en-US" sz="3200" dirty="0">
@@ -13779,14 +13717,8 @@
                 <a:ea typeface="微軟正黑體" panose="020B0604030504040204" pitchFamily="34" charset="-120"/>
                 <a:cs typeface="Heiti TC Light"/>
               </a:rPr>
-              <a:t>思維鍊</a:t>
-            </a:r>
-          </a:p>
-          <a:p>
-            <a:pPr marL="361950" indent="-361950">
-              <a:buFont typeface="Arial" panose="020B0604020202020204" pitchFamily="34" charset="0"/>
-              <a:buChar char="•"/>
-            </a:pPr>
+              <a:t>的模型</a:t>
+            </a:r>
             <a:endParaRPr kumimoji="1" lang="en-US" altLang="zh-TW" sz="3200" dirty="0">
               <a:effectLst>
                 <a:outerShdw blurRad="38100" dist="38100" dir="2700000" algn="tl">
@@ -13805,6 +13737,51 @@
               <a:buFont typeface="Arial" panose="020B0604020202020204" pitchFamily="34" charset="0"/>
               <a:buChar char="•"/>
             </a:pPr>
+            <a:r>
+              <a:rPr kumimoji="1" lang="zh-TW" altLang="en-US" sz="3200" dirty="0">
+                <a:effectLst>
+                  <a:outerShdw blurRad="38100" dist="38100" dir="2700000" algn="tl">
+                    <a:srgbClr val="000000">
+                      <a:alpha val="43137"/>
+                    </a:srgbClr>
+                  </a:outerShdw>
+                </a:effectLst>
+                <a:latin typeface="微軟正黑體" panose="020B0604030504040204" pitchFamily="34" charset="-120"/>
+                <a:ea typeface="微軟正黑體" panose="020B0604030504040204" pitchFamily="34" charset="-120"/>
+                <a:cs typeface="Heiti TC Light"/>
+              </a:rPr>
+              <a:t>指令 </a:t>
+            </a:r>
+            <a:r>
+              <a:rPr kumimoji="1" lang="en-US" altLang="zh-TW" sz="3200" dirty="0">
+                <a:effectLst>
+                  <a:outerShdw blurRad="38100" dist="38100" dir="2700000" algn="tl">
+                    <a:srgbClr val="000000">
+                      <a:alpha val="43137"/>
+                    </a:srgbClr>
+                  </a:outerShdw>
+                </a:effectLst>
+                <a:latin typeface="微軟正黑體" panose="020B0604030504040204" pitchFamily="34" charset="-120"/>
+                <a:ea typeface="微軟正黑體" panose="020B0604030504040204" pitchFamily="34" charset="-120"/>
+                <a:cs typeface="Heiti TC Light"/>
+              </a:rPr>
+              <a:t>vs. </a:t>
+            </a:r>
+            <a:r>
+              <a:rPr kumimoji="1" lang="zh-TW" altLang="en-US" sz="3200" dirty="0">
+                <a:effectLst>
+                  <a:outerShdw blurRad="38100" dist="38100" dir="2700000" algn="tl">
+                    <a:srgbClr val="000000">
+                      <a:alpha val="43137"/>
+                    </a:srgbClr>
+                  </a:outerShdw>
+                </a:effectLst>
+                <a:latin typeface="微軟正黑體" panose="020B0604030504040204" pitchFamily="34" charset="-120"/>
+                <a:ea typeface="微軟正黑體" panose="020B0604030504040204" pitchFamily="34" charset="-120"/>
+                <a:cs typeface="Heiti TC Light"/>
+              </a:rPr>
+              <a:t>人類價值觀</a:t>
+            </a:r>
             <a:endParaRPr kumimoji="1" lang="en-US" altLang="zh-TW" sz="3200" dirty="0">
               <a:effectLst>
                 <a:outerShdw blurRad="38100" dist="38100" dir="2700000" algn="tl">
@@ -13823,24 +13800,51 @@
               <a:buFont typeface="Arial" panose="020B0604020202020204" pitchFamily="34" charset="0"/>
               <a:buChar char="•"/>
             </a:pPr>
-            <a:endParaRPr kumimoji="1" lang="zh-TW" altLang="en-US" sz="3200" dirty="0">
-              <a:effectLst>
-                <a:outerShdw blurRad="38100" dist="38100" dir="2700000" algn="tl">
-                  <a:srgbClr val="000000">
-                    <a:alpha val="43137"/>
-                  </a:srgbClr>
-                </a:outerShdw>
-              </a:effectLst>
-              <a:latin typeface="微軟正黑體" panose="020B0604030504040204" pitchFamily="34" charset="-120"/>
-              <a:ea typeface="微軟正黑體" panose="020B0604030504040204" pitchFamily="34" charset="-120"/>
-              <a:cs typeface="Heiti TC Light"/>
-            </a:endParaRPr>
-          </a:p>
-          <a:p>
-            <a:pPr marL="361950" indent="-361950">
-              <a:buFont typeface="Arial" panose="020B0604020202020204" pitchFamily="34" charset="0"/>
-              <a:buChar char="•"/>
-            </a:pPr>
+            <a:r>
+              <a:rPr kumimoji="1" lang="zh-TW" altLang="en-US" sz="3200" dirty="0">
+                <a:effectLst>
+                  <a:outerShdw blurRad="38100" dist="38100" dir="2700000" algn="tl">
+                    <a:srgbClr val="000000">
+                      <a:alpha val="43137"/>
+                    </a:srgbClr>
+                  </a:outerShdw>
+                </a:effectLst>
+                <a:latin typeface="微軟正黑體" panose="020B0604030504040204" pitchFamily="34" charset="-120"/>
+                <a:ea typeface="微軟正黑體" panose="020B0604030504040204" pitchFamily="34" charset="-120"/>
+                <a:cs typeface="Heiti TC Light"/>
+              </a:rPr>
+              <a:t>使用</a:t>
+            </a:r>
+            <a:r>
+              <a:rPr kumimoji="1" lang="en-US" altLang="zh-TW" sz="3200" dirty="0">
+                <a:effectLst>
+                  <a:outerShdw blurRad="38100" dist="38100" dir="2700000" algn="tl">
+                    <a:srgbClr val="000000">
+                      <a:alpha val="43137"/>
+                    </a:srgbClr>
+                  </a:outerShdw>
+                </a:effectLst>
+                <a:latin typeface="微軟正黑體" panose="020B0604030504040204" pitchFamily="34" charset="-120"/>
+                <a:ea typeface="微軟正黑體" panose="020B0604030504040204" pitchFamily="34" charset="-120"/>
+                <a:cs typeface="Heiti TC Light"/>
+              </a:rPr>
+              <a:t>SFT</a:t>
+            </a:r>
+            <a:r>
+              <a:rPr kumimoji="1" lang="zh-TW" altLang="en-US" sz="3200" dirty="0">
+                <a:effectLst>
+                  <a:outerShdw blurRad="38100" dist="38100" dir="2700000" algn="tl">
+                    <a:srgbClr val="000000">
+                      <a:alpha val="43137"/>
+                    </a:srgbClr>
+                  </a:outerShdw>
+                </a:effectLst>
+                <a:latin typeface="微軟正黑體" panose="020B0604030504040204" pitchFamily="34" charset="-120"/>
+                <a:ea typeface="微軟正黑體" panose="020B0604030504040204" pitchFamily="34" charset="-120"/>
+                <a:cs typeface="Heiti TC Light"/>
+              </a:rPr>
+              <a:t>的作法</a:t>
+            </a:r>
             <a:endParaRPr kumimoji="1" lang="en-US" altLang="zh-TW" sz="3200" dirty="0">
               <a:effectLst>
                 <a:outerShdw blurRad="38100" dist="38100" dir="2700000" algn="tl">
@@ -13854,6 +13858,222 @@
               <a:cs typeface="Heiti TC Light"/>
             </a:endParaRPr>
           </a:p>
+          <a:p>
+            <a:pPr marL="361950" indent="-361950">
+              <a:buFont typeface="Arial" panose="020B0604020202020204" pitchFamily="34" charset="0"/>
+              <a:buChar char="•"/>
+            </a:pPr>
+            <a:r>
+              <a:rPr kumimoji="1" lang="zh-TW" altLang="en-US" sz="3200" dirty="0">
+                <a:effectLst>
+                  <a:outerShdw blurRad="38100" dist="38100" dir="2700000" algn="tl">
+                    <a:srgbClr val="000000">
+                      <a:alpha val="43137"/>
+                    </a:srgbClr>
+                  </a:outerShdw>
+                </a:effectLst>
+                <a:latin typeface="微軟正黑體" panose="020B0604030504040204" pitchFamily="34" charset="-120"/>
+                <a:ea typeface="微軟正黑體" panose="020B0604030504040204" pitchFamily="34" charset="-120"/>
+                <a:cs typeface="Heiti TC Light"/>
+              </a:rPr>
+              <a:t>什麼是</a:t>
+            </a:r>
+            <a:r>
+              <a:rPr kumimoji="1" lang="en-US" altLang="zh-TW" sz="3200" dirty="0">
+                <a:effectLst>
+                  <a:outerShdw blurRad="38100" dist="38100" dir="2700000" algn="tl">
+                    <a:srgbClr val="000000">
+                      <a:alpha val="43137"/>
+                    </a:srgbClr>
+                  </a:outerShdw>
+                </a:effectLst>
+                <a:latin typeface="微軟正黑體" panose="020B0604030504040204" pitchFamily="34" charset="-120"/>
+                <a:ea typeface="微軟正黑體" panose="020B0604030504040204" pitchFamily="34" charset="-120"/>
+                <a:cs typeface="Heiti TC Light"/>
+              </a:rPr>
+              <a:t>RL</a:t>
+            </a:r>
+            <a:r>
+              <a:rPr kumimoji="1" lang="zh-TW" altLang="en-US" sz="3200" dirty="0">
+                <a:effectLst>
+                  <a:outerShdw blurRad="38100" dist="38100" dir="2700000" algn="tl">
+                    <a:srgbClr val="000000">
+                      <a:alpha val="43137"/>
+                    </a:srgbClr>
+                  </a:outerShdw>
+                </a:effectLst>
+                <a:latin typeface="微軟正黑體" panose="020B0604030504040204" pitchFamily="34" charset="-120"/>
+                <a:ea typeface="微軟正黑體" panose="020B0604030504040204" pitchFamily="34" charset="-120"/>
+                <a:cs typeface="Heiti TC Light"/>
+              </a:rPr>
+              <a:t>？</a:t>
+            </a:r>
+            <a:endParaRPr kumimoji="1" lang="en-US" altLang="zh-TW" sz="3200" dirty="0">
+              <a:effectLst>
+                <a:outerShdw blurRad="38100" dist="38100" dir="2700000" algn="tl">
+                  <a:srgbClr val="000000">
+                    <a:alpha val="43137"/>
+                  </a:srgbClr>
+                </a:outerShdw>
+              </a:effectLst>
+              <a:latin typeface="微軟正黑體" panose="020B0604030504040204" pitchFamily="34" charset="-120"/>
+              <a:ea typeface="微軟正黑體" panose="020B0604030504040204" pitchFamily="34" charset="-120"/>
+              <a:cs typeface="Heiti TC Light"/>
+            </a:endParaRPr>
+          </a:p>
+          <a:p>
+            <a:pPr marL="361950" indent="-361950">
+              <a:buFont typeface="Arial" panose="020B0604020202020204" pitchFamily="34" charset="0"/>
+              <a:buChar char="•"/>
+            </a:pPr>
+            <a:r>
+              <a:rPr kumimoji="1" lang="zh-TW" altLang="en-US" sz="3200" dirty="0">
+                <a:effectLst>
+                  <a:outerShdw blurRad="38100" dist="38100" dir="2700000" algn="tl">
+                    <a:srgbClr val="000000">
+                      <a:alpha val="43137"/>
+                    </a:srgbClr>
+                  </a:outerShdw>
+                </a:effectLst>
+                <a:latin typeface="微軟正黑體" panose="020B0604030504040204" pitchFamily="34" charset="-120"/>
+                <a:ea typeface="微軟正黑體" panose="020B0604030504040204" pitchFamily="34" charset="-120"/>
+                <a:cs typeface="Heiti TC Light"/>
+              </a:rPr>
+              <a:t>使用</a:t>
+            </a:r>
+            <a:r>
+              <a:rPr kumimoji="1" lang="en-US" altLang="zh-TW" sz="3200" dirty="0">
+                <a:effectLst>
+                  <a:outerShdw blurRad="38100" dist="38100" dir="2700000" algn="tl">
+                    <a:srgbClr val="000000">
+                      <a:alpha val="43137"/>
+                    </a:srgbClr>
+                  </a:outerShdw>
+                </a:effectLst>
+                <a:latin typeface="微軟正黑體" panose="020B0604030504040204" pitchFamily="34" charset="-120"/>
+                <a:ea typeface="微軟正黑體" panose="020B0604030504040204" pitchFamily="34" charset="-120"/>
+                <a:cs typeface="Heiti TC Light"/>
+              </a:rPr>
+              <a:t>RLHF</a:t>
+            </a:r>
+            <a:r>
+              <a:rPr kumimoji="1" lang="zh-TW" altLang="en-US" sz="3200" dirty="0">
+                <a:effectLst>
+                  <a:outerShdw blurRad="38100" dist="38100" dir="2700000" algn="tl">
+                    <a:srgbClr val="000000">
+                      <a:alpha val="43137"/>
+                    </a:srgbClr>
+                  </a:outerShdw>
+                </a:effectLst>
+                <a:latin typeface="微軟正黑體" panose="020B0604030504040204" pitchFamily="34" charset="-120"/>
+                <a:ea typeface="微軟正黑體" panose="020B0604030504040204" pitchFamily="34" charset="-120"/>
+                <a:cs typeface="Heiti TC Light"/>
+              </a:rPr>
+              <a:t>的作法</a:t>
+            </a:r>
+            <a:endParaRPr kumimoji="1" lang="en-US" altLang="zh-TW" sz="3200" dirty="0">
+              <a:effectLst>
+                <a:outerShdw blurRad="38100" dist="38100" dir="2700000" algn="tl">
+                  <a:srgbClr val="000000">
+                    <a:alpha val="43137"/>
+                  </a:srgbClr>
+                </a:outerShdw>
+              </a:effectLst>
+              <a:latin typeface="微軟正黑體" panose="020B0604030504040204" pitchFamily="34" charset="-120"/>
+              <a:ea typeface="微軟正黑體" panose="020B0604030504040204" pitchFamily="34" charset="-120"/>
+              <a:cs typeface="Heiti TC Light"/>
+            </a:endParaRPr>
+          </a:p>
+          <a:p>
+            <a:pPr marL="361950" indent="-361950">
+              <a:buFont typeface="Arial" panose="020B0604020202020204" pitchFamily="34" charset="0"/>
+              <a:buChar char="•"/>
+            </a:pPr>
+            <a:r>
+              <a:rPr kumimoji="1" lang="en-US" altLang="zh-TW" sz="3200" dirty="0">
+                <a:effectLst>
+                  <a:outerShdw blurRad="38100" dist="38100" dir="2700000" algn="tl">
+                    <a:srgbClr val="000000">
+                      <a:alpha val="43137"/>
+                    </a:srgbClr>
+                  </a:outerShdw>
+                </a:effectLst>
+                <a:latin typeface="微軟正黑體" panose="020B0604030504040204" pitchFamily="34" charset="-120"/>
+                <a:ea typeface="微軟正黑體" panose="020B0604030504040204" pitchFamily="34" charset="-120"/>
+                <a:cs typeface="Heiti TC Light"/>
+              </a:rPr>
+              <a:t>RLHF</a:t>
+            </a:r>
+            <a:r>
+              <a:rPr kumimoji="1" lang="zh-TW" altLang="en-US" sz="3200" dirty="0">
+                <a:effectLst>
+                  <a:outerShdw blurRad="38100" dist="38100" dir="2700000" algn="tl">
+                    <a:srgbClr val="000000">
+                      <a:alpha val="43137"/>
+                    </a:srgbClr>
+                  </a:outerShdw>
+                </a:effectLst>
+                <a:latin typeface="微軟正黑體" panose="020B0604030504040204" pitchFamily="34" charset="-120"/>
+                <a:ea typeface="微軟正黑體" panose="020B0604030504040204" pitchFamily="34" charset="-120"/>
+                <a:cs typeface="Heiti TC Light"/>
+              </a:rPr>
+              <a:t>的其它細節</a:t>
+            </a:r>
+          </a:p>
+          <a:p>
+            <a:pPr marL="361950" indent="-361950">
+              <a:buFont typeface="Arial" panose="020B0604020202020204" pitchFamily="34" charset="0"/>
+              <a:buChar char="•"/>
+            </a:pPr>
+            <a:r>
+              <a:rPr kumimoji="1" lang="zh-TW" altLang="en-US" sz="3200" dirty="0">
+                <a:effectLst>
+                  <a:outerShdw blurRad="38100" dist="38100" dir="2700000" algn="tl">
+                    <a:srgbClr val="000000">
+                      <a:alpha val="43137"/>
+                    </a:srgbClr>
+                  </a:outerShdw>
+                </a:effectLst>
+                <a:latin typeface="微軟正黑體" panose="020B0604030504040204" pitchFamily="34" charset="-120"/>
+                <a:ea typeface="微軟正黑體" panose="020B0604030504040204" pitchFamily="34" charset="-120"/>
+                <a:cs typeface="Heiti TC Light"/>
+              </a:rPr>
+              <a:t>大型語言模的進化</a:t>
+            </a:r>
+            <a:endParaRPr kumimoji="1" lang="en-US" altLang="zh-TW" sz="3200" dirty="0">
+              <a:effectLst>
+                <a:outerShdw blurRad="38100" dist="38100" dir="2700000" algn="tl">
+                  <a:srgbClr val="000000">
+                    <a:alpha val="43137"/>
+                  </a:srgbClr>
+                </a:outerShdw>
+              </a:effectLst>
+              <a:latin typeface="微軟正黑體" panose="020B0604030504040204" pitchFamily="34" charset="-120"/>
+              <a:ea typeface="微軟正黑體" panose="020B0604030504040204" pitchFamily="34" charset="-120"/>
+              <a:cs typeface="Heiti TC Light"/>
+            </a:endParaRPr>
+          </a:p>
+          <a:p>
+            <a:pPr marL="361950" indent="-361950">
+              <a:buFont typeface="Arial" panose="020B0604020202020204" pitchFamily="34" charset="0"/>
+              <a:buChar char="•"/>
+            </a:pPr>
+            <a:r>
+              <a:rPr kumimoji="1" lang="zh-TW" altLang="en-US" sz="3200" dirty="0">
+                <a:effectLst>
+                  <a:outerShdw blurRad="38100" dist="38100" dir="2700000" algn="tl">
+                    <a:srgbClr val="000000">
+                      <a:alpha val="43137"/>
+                    </a:srgbClr>
+                  </a:outerShdw>
+                </a:effectLst>
+                <a:latin typeface="微軟正黑體" panose="020B0604030504040204" pitchFamily="34" charset="-120"/>
+                <a:ea typeface="微軟正黑體" panose="020B0604030504040204" pitchFamily="34" charset="-120"/>
+                <a:cs typeface="Heiti TC Light"/>
+              </a:rPr>
+              <a:t>從結果找指令</a:t>
+            </a:r>
+          </a:p>
         </p:txBody>
       </p:sp>
       <p:sp>
@@ -13866,8 +14086,8 @@
         </p:nvSpPr>
         <p:spPr>
           <a:xfrm>
-            <a:off x="1066800" y="304800"/>
-            <a:ext cx="7162800" cy="990600"/>
+            <a:off x="1638300" y="304800"/>
+            <a:ext cx="5867400" cy="990600"/>
           </a:xfrm>
           <a:prstGeom prst="rect">
             <a:avLst/>
@@ -13917,35 +14137,84 @@
                 <a:ea typeface="微軟正黑體" panose="020B0604030504040204" pitchFamily="34" charset="-120"/>
                 <a:cs typeface="+mn-cs"/>
               </a:rPr>
-              <a:t>15. Instruction Tuning</a:t>
-            </a:r>
-            <a:endParaRPr kumimoji="0" lang="zh-TW" altLang="en-US" sz="4800" b="1" i="0" u="none" strike="noStrike" kern="0" cap="none" spc="0" normalizeH="0" baseline="0" noProof="0" dirty="0">
-              <a:ln>
-                <a:noFill/>
-              </a:ln>
-              <a:solidFill>
-                <a:srgbClr val="00B0F0"/>
-              </a:solidFill>
-              <a:effectLst>
-                <a:outerShdw blurRad="38100" dist="38100" dir="2700000" algn="tl">
-                  <a:srgbClr val="000000">
-                    <a:alpha val="43137"/>
-                  </a:srgbClr>
-                </a:outerShdw>
-              </a:effectLst>
-              <a:uLnTx/>
-              <a:uFillTx/>
-              <a:latin typeface="微軟正黑體" panose="020B0604030504040204" pitchFamily="34" charset="-120"/>
-              <a:ea typeface="微軟正黑體" panose="020B0604030504040204" pitchFamily="34" charset="-120"/>
-              <a:cs typeface="+mn-cs"/>
-            </a:endParaRPr>
+              <a:t>15. </a:t>
+            </a:r>
+            <a:r>
+              <a:rPr kumimoji="0" lang="zh-TW" altLang="en-US" sz="4800" b="1" i="0" u="none" strike="noStrike" kern="0" cap="none" spc="0" normalizeH="0" baseline="0" noProof="0" dirty="0">
+                <a:ln>
+                  <a:noFill/>
+                </a:ln>
+                <a:solidFill>
+                  <a:srgbClr val="00B0F0"/>
+                </a:solidFill>
+                <a:effectLst>
+                  <a:outerShdw blurRad="38100" dist="38100" dir="2700000" algn="tl">
+                    <a:srgbClr val="000000">
+                      <a:alpha val="43137"/>
+                    </a:srgbClr>
+                  </a:outerShdw>
+                </a:effectLst>
+                <a:uLnTx/>
+                <a:uFillTx/>
+                <a:latin typeface="微軟正黑體" panose="020B0604030504040204" pitchFamily="34" charset="-120"/>
+                <a:ea typeface="微軟正黑體" panose="020B0604030504040204" pitchFamily="34" charset="-120"/>
+                <a:cs typeface="+mn-cs"/>
+              </a:rPr>
+              <a:t>進入</a:t>
+            </a:r>
+            <a:r>
+              <a:rPr kumimoji="0" lang="en-US" altLang="zh-TW" sz="4800" b="1" i="0" u="none" strike="noStrike" kern="0" cap="none" spc="0" normalizeH="0" baseline="0" noProof="0" dirty="0">
+                <a:ln>
+                  <a:noFill/>
+                </a:ln>
+                <a:solidFill>
+                  <a:srgbClr val="00B0F0"/>
+                </a:solidFill>
+                <a:effectLst>
+                  <a:outerShdw blurRad="38100" dist="38100" dir="2700000" algn="tl">
+                    <a:srgbClr val="000000">
+                      <a:alpha val="43137"/>
+                    </a:srgbClr>
+                  </a:outerShdw>
+                </a:effectLst>
+                <a:uLnTx/>
+                <a:uFillTx/>
+                <a:latin typeface="微軟正黑體" panose="020B0604030504040204" pitchFamily="34" charset="-120"/>
+                <a:ea typeface="微軟正黑體" panose="020B0604030504040204" pitchFamily="34" charset="-120"/>
+                <a:cs typeface="+mn-cs"/>
+              </a:rPr>
+              <a:t>RLHF</a:t>
+            </a:r>
+            <a:r>
+              <a:rPr kumimoji="0" lang="zh-TW" altLang="en-US" sz="4800" b="1" i="0" u="none" strike="noStrike" kern="0" cap="none" spc="0" normalizeH="0" baseline="0" noProof="0" dirty="0">
+                <a:ln>
+                  <a:noFill/>
+                </a:ln>
+                <a:solidFill>
+                  <a:srgbClr val="00B0F0"/>
+                </a:solidFill>
+                <a:effectLst>
+                  <a:outerShdw blurRad="38100" dist="38100" dir="2700000" algn="tl">
+                    <a:srgbClr val="000000">
+                      <a:alpha val="43137"/>
+                    </a:srgbClr>
+                  </a:outerShdw>
+                </a:effectLst>
+                <a:uLnTx/>
+                <a:uFillTx/>
+                <a:latin typeface="微軟正黑體" panose="020B0604030504040204" pitchFamily="34" charset="-120"/>
+                <a:ea typeface="微軟正黑體" panose="020B0604030504040204" pitchFamily="34" charset="-120"/>
+                <a:cs typeface="+mn-cs"/>
+              </a:rPr>
+              <a:t>階段</a:t>
+            </a:r>
           </a:p>
         </p:txBody>
       </p:sp>
     </p:spTree>
     <p:extLst>
       <p:ext uri="{BB962C8B-B14F-4D97-AF65-F5344CB8AC3E}">
-        <p14:creationId xmlns:p14="http://schemas.microsoft.com/office/powerpoint/2010/main" val="2700486613"/>
+        <p14:creationId xmlns:p14="http://schemas.microsoft.com/office/powerpoint/2010/main" val="1661374500"/>
       </p:ext>
     </p:extLst>
   </p:cSld>
@@ -14302,7 +14571,7 @@
         <p:spPr>
           <a:xfrm>
             <a:off x="685800" y="1676400"/>
-            <a:ext cx="8077200" cy="4524315"/>
+            <a:ext cx="8077200" cy="1077218"/>
           </a:xfrm>
           <a:prstGeom prst="rect">
             <a:avLst/>
@@ -14319,6 +14588,21 @@
               <a:buFont typeface="Arial" panose="020B0604020202020204" pitchFamily="34" charset="0"/>
               <a:buChar char="•"/>
             </a:pPr>
+            <a:r>
+              <a:rPr kumimoji="1" lang="en-US" altLang="zh-TW" sz="3200" dirty="0">
+                <a:effectLst>
+                  <a:outerShdw blurRad="38100" dist="38100" dir="2700000" algn="tl">
+                    <a:srgbClr val="000000">
+                      <a:alpha val="43137"/>
+                    </a:srgbClr>
+                  </a:outerShdw>
+                </a:effectLst>
+                <a:latin typeface="微軟正黑體" panose="020B0604030504040204" pitchFamily="34" charset="-120"/>
+                <a:ea typeface="微軟正黑體" panose="020B0604030504040204" pitchFamily="34" charset="-120"/>
+                <a:cs typeface="Heiti TC Light"/>
+              </a:rPr>
+              <a:t>RLHF</a:t>
+            </a:r>
             <a:r>
               <a:rPr kumimoji="1" lang="zh-TW" altLang="en-US" sz="3200" dirty="0">
                 <a:effectLst>
@@ -14332,7 +14616,7 @@
                 <a:ea typeface="微軟正黑體" panose="020B0604030504040204" pitchFamily="34" charset="-120"/>
                 <a:cs typeface="Heiti TC Light"/>
               </a:rPr>
-              <a:t>只是聽指令而已嗎？</a:t>
+              <a:t>的問題</a:t>
             </a:r>
             <a:endParaRPr kumimoji="1" lang="en-US" altLang="zh-TW" sz="3200" dirty="0">
               <a:effectLst>
@@ -14353,6 +14637,21 @@
               <a:buChar char="•"/>
             </a:pPr>
             <a:r>
+              <a:rPr kumimoji="1" lang="en-US" altLang="zh-TW" sz="3200" dirty="0">
+                <a:effectLst>
+                  <a:outerShdw blurRad="38100" dist="38100" dir="2700000" algn="tl">
+                    <a:srgbClr val="000000">
+                      <a:alpha val="43137"/>
+                    </a:srgbClr>
+                  </a:outerShdw>
+                </a:effectLst>
+                <a:latin typeface="微軟正黑體" panose="020B0604030504040204" pitchFamily="34" charset="-120"/>
+                <a:ea typeface="微軟正黑體" panose="020B0604030504040204" pitchFamily="34" charset="-120"/>
+                <a:cs typeface="Heiti TC Light"/>
+              </a:rPr>
+              <a:t>DPO</a:t>
+            </a:r>
+            <a:r>
               <a:rPr kumimoji="1" lang="zh-TW" altLang="en-US" sz="3200" dirty="0">
                 <a:effectLst>
                   <a:outerShdw blurRad="38100" dist="38100" dir="2700000" algn="tl">
@@ -14365,391 +14664,7 @@
                 <a:ea typeface="微軟正黑體" panose="020B0604030504040204" pitchFamily="34" charset="-120"/>
                 <a:cs typeface="Heiti TC Light"/>
               </a:rPr>
-              <a:t>經過之後</a:t>
-            </a:r>
-            <a:r>
-              <a:rPr kumimoji="1" lang="en-US" altLang="zh-TW" sz="3200" dirty="0">
-                <a:effectLst>
-                  <a:outerShdw blurRad="38100" dist="38100" dir="2700000" algn="tl">
-                    <a:srgbClr val="000000">
-                      <a:alpha val="43137"/>
-                    </a:srgbClr>
-                  </a:outerShdw>
-                </a:effectLst>
-                <a:latin typeface="微軟正黑體" panose="020B0604030504040204" pitchFamily="34" charset="-120"/>
-                <a:ea typeface="微軟正黑體" panose="020B0604030504040204" pitchFamily="34" charset="-120"/>
-                <a:cs typeface="Heiti TC Light"/>
-              </a:rPr>
-              <a:t>SFT</a:t>
-            </a:r>
-            <a:r>
-              <a:rPr kumimoji="1" lang="zh-TW" altLang="en-US" sz="3200" dirty="0">
-                <a:effectLst>
-                  <a:outerShdw blurRad="38100" dist="38100" dir="2700000" algn="tl">
-                    <a:srgbClr val="000000">
-                      <a:alpha val="43137"/>
-                    </a:srgbClr>
-                  </a:outerShdw>
-                </a:effectLst>
-                <a:latin typeface="微軟正黑體" panose="020B0604030504040204" pitchFamily="34" charset="-120"/>
-                <a:ea typeface="微軟正黑體" panose="020B0604030504040204" pitchFamily="34" charset="-120"/>
-                <a:cs typeface="Heiti TC Light"/>
-              </a:rPr>
-              <a:t>的模型</a:t>
-            </a:r>
-            <a:endParaRPr kumimoji="1" lang="en-US" altLang="zh-TW" sz="3200" dirty="0">
-              <a:effectLst>
-                <a:outerShdw blurRad="38100" dist="38100" dir="2700000" algn="tl">
-                  <a:srgbClr val="000000">
-                    <a:alpha val="43137"/>
-                  </a:srgbClr>
-                </a:outerShdw>
-              </a:effectLst>
-              <a:latin typeface="微軟正黑體" panose="020B0604030504040204" pitchFamily="34" charset="-120"/>
-              <a:ea typeface="微軟正黑體" panose="020B0604030504040204" pitchFamily="34" charset="-120"/>
-              <a:cs typeface="Heiti TC Light"/>
-            </a:endParaRPr>
-          </a:p>
-          <a:p>
-            <a:pPr marL="361950" indent="-361950">
-              <a:buFont typeface="Arial" panose="020B0604020202020204" pitchFamily="34" charset="0"/>
-              <a:buChar char="•"/>
-            </a:pPr>
-            <a:r>
-              <a:rPr kumimoji="1" lang="zh-TW" altLang="en-US" sz="3200" dirty="0">
-                <a:effectLst>
-                  <a:outerShdw blurRad="38100" dist="38100" dir="2700000" algn="tl">
-                    <a:srgbClr val="000000">
-                      <a:alpha val="43137"/>
-                    </a:srgbClr>
-                  </a:outerShdw>
-                </a:effectLst>
-                <a:latin typeface="微軟正黑體" panose="020B0604030504040204" pitchFamily="34" charset="-120"/>
-                <a:ea typeface="微軟正黑體" panose="020B0604030504040204" pitchFamily="34" charset="-120"/>
-                <a:cs typeface="Heiti TC Light"/>
-              </a:rPr>
-              <a:t>指令 </a:t>
-            </a:r>
-            <a:r>
-              <a:rPr kumimoji="1" lang="en-US" altLang="zh-TW" sz="3200" dirty="0">
-                <a:effectLst>
-                  <a:outerShdw blurRad="38100" dist="38100" dir="2700000" algn="tl">
-                    <a:srgbClr val="000000">
-                      <a:alpha val="43137"/>
-                    </a:srgbClr>
-                  </a:outerShdw>
-                </a:effectLst>
-                <a:latin typeface="微軟正黑體" panose="020B0604030504040204" pitchFamily="34" charset="-120"/>
-                <a:ea typeface="微軟正黑體" panose="020B0604030504040204" pitchFamily="34" charset="-120"/>
-                <a:cs typeface="Heiti TC Light"/>
-              </a:rPr>
-              <a:t>vs. </a:t>
-            </a:r>
-            <a:r>
-              <a:rPr kumimoji="1" lang="zh-TW" altLang="en-US" sz="3200" dirty="0">
-                <a:effectLst>
-                  <a:outerShdw blurRad="38100" dist="38100" dir="2700000" algn="tl">
-                    <a:srgbClr val="000000">
-                      <a:alpha val="43137"/>
-                    </a:srgbClr>
-                  </a:outerShdw>
-                </a:effectLst>
-                <a:latin typeface="微軟正黑體" panose="020B0604030504040204" pitchFamily="34" charset="-120"/>
-                <a:ea typeface="微軟正黑體" panose="020B0604030504040204" pitchFamily="34" charset="-120"/>
-                <a:cs typeface="Heiti TC Light"/>
-              </a:rPr>
-              <a:t>人類價值觀</a:t>
-            </a:r>
-            <a:endParaRPr kumimoji="1" lang="en-US" altLang="zh-TW" sz="3200" dirty="0">
-              <a:effectLst>
-                <a:outerShdw blurRad="38100" dist="38100" dir="2700000" algn="tl">
-                  <a:srgbClr val="000000">
-                    <a:alpha val="43137"/>
-                  </a:srgbClr>
-                </a:outerShdw>
-              </a:effectLst>
-              <a:latin typeface="微軟正黑體" panose="020B0604030504040204" pitchFamily="34" charset="-120"/>
-              <a:ea typeface="微軟正黑體" panose="020B0604030504040204" pitchFamily="34" charset="-120"/>
-              <a:cs typeface="Heiti TC Light"/>
-            </a:endParaRPr>
-          </a:p>
-          <a:p>
-            <a:pPr marL="361950" indent="-361950">
-              <a:buFont typeface="Arial" panose="020B0604020202020204" pitchFamily="34" charset="0"/>
-              <a:buChar char="•"/>
-            </a:pPr>
-            <a:r>
-              <a:rPr kumimoji="1" lang="zh-TW" altLang="en-US" sz="3200" dirty="0">
-                <a:effectLst>
-                  <a:outerShdw blurRad="38100" dist="38100" dir="2700000" algn="tl">
-                    <a:srgbClr val="000000">
-                      <a:alpha val="43137"/>
-                    </a:srgbClr>
-                  </a:outerShdw>
-                </a:effectLst>
-                <a:latin typeface="微軟正黑體" panose="020B0604030504040204" pitchFamily="34" charset="-120"/>
-                <a:ea typeface="微軟正黑體" panose="020B0604030504040204" pitchFamily="34" charset="-120"/>
-                <a:cs typeface="Heiti TC Light"/>
-              </a:rPr>
-              <a:t>使用</a:t>
-            </a:r>
-            <a:r>
-              <a:rPr kumimoji="1" lang="en-US" altLang="zh-TW" sz="3200" dirty="0">
-                <a:effectLst>
-                  <a:outerShdw blurRad="38100" dist="38100" dir="2700000" algn="tl">
-                    <a:srgbClr val="000000">
-                      <a:alpha val="43137"/>
-                    </a:srgbClr>
-                  </a:outerShdw>
-                </a:effectLst>
-                <a:latin typeface="微軟正黑體" panose="020B0604030504040204" pitchFamily="34" charset="-120"/>
-                <a:ea typeface="微軟正黑體" panose="020B0604030504040204" pitchFamily="34" charset="-120"/>
-                <a:cs typeface="Heiti TC Light"/>
-              </a:rPr>
-              <a:t>SFT</a:t>
-            </a:r>
-            <a:r>
-              <a:rPr kumimoji="1" lang="zh-TW" altLang="en-US" sz="3200" dirty="0">
-                <a:effectLst>
-                  <a:outerShdw blurRad="38100" dist="38100" dir="2700000" algn="tl">
-                    <a:srgbClr val="000000">
-                      <a:alpha val="43137"/>
-                    </a:srgbClr>
-                  </a:outerShdw>
-                </a:effectLst>
-                <a:latin typeface="微軟正黑體" panose="020B0604030504040204" pitchFamily="34" charset="-120"/>
-                <a:ea typeface="微軟正黑體" panose="020B0604030504040204" pitchFamily="34" charset="-120"/>
-                <a:cs typeface="Heiti TC Light"/>
-              </a:rPr>
-              <a:t>的作法</a:t>
-            </a:r>
-            <a:endParaRPr kumimoji="1" lang="en-US" altLang="zh-TW" sz="3200" dirty="0">
-              <a:effectLst>
-                <a:outerShdw blurRad="38100" dist="38100" dir="2700000" algn="tl">
-                  <a:srgbClr val="000000">
-                    <a:alpha val="43137"/>
-                  </a:srgbClr>
-                </a:outerShdw>
-              </a:effectLst>
-              <a:latin typeface="微軟正黑體" panose="020B0604030504040204" pitchFamily="34" charset="-120"/>
-              <a:ea typeface="微軟正黑體" panose="020B0604030504040204" pitchFamily="34" charset="-120"/>
-              <a:cs typeface="Heiti TC Light"/>
-            </a:endParaRPr>
-          </a:p>
-          <a:p>
-            <a:pPr marL="361950" indent="-361950">
-              <a:buFont typeface="Arial" panose="020B0604020202020204" pitchFamily="34" charset="0"/>
-              <a:buChar char="•"/>
-            </a:pPr>
-            <a:r>
-              <a:rPr kumimoji="1" lang="zh-TW" altLang="en-US" sz="3200" dirty="0">
-                <a:effectLst>
-                  <a:outerShdw blurRad="38100" dist="38100" dir="2700000" algn="tl">
-                    <a:srgbClr val="000000">
-                      <a:alpha val="43137"/>
-                    </a:srgbClr>
-                  </a:outerShdw>
-                </a:effectLst>
-                <a:latin typeface="微軟正黑體" panose="020B0604030504040204" pitchFamily="34" charset="-120"/>
-                <a:ea typeface="微軟正黑體" panose="020B0604030504040204" pitchFamily="34" charset="-120"/>
-                <a:cs typeface="Heiti TC Light"/>
-              </a:rPr>
-              <a:t>什麼是</a:t>
-            </a:r>
-            <a:r>
-              <a:rPr kumimoji="1" lang="en-US" altLang="zh-TW" sz="3200" dirty="0">
-                <a:effectLst>
-                  <a:outerShdw blurRad="38100" dist="38100" dir="2700000" algn="tl">
-                    <a:srgbClr val="000000">
-                      <a:alpha val="43137"/>
-                    </a:srgbClr>
-                  </a:outerShdw>
-                </a:effectLst>
-                <a:latin typeface="微軟正黑體" panose="020B0604030504040204" pitchFamily="34" charset="-120"/>
-                <a:ea typeface="微軟正黑體" panose="020B0604030504040204" pitchFamily="34" charset="-120"/>
-                <a:cs typeface="Heiti TC Light"/>
-              </a:rPr>
-              <a:t>RL</a:t>
-            </a:r>
-            <a:r>
-              <a:rPr kumimoji="1" lang="zh-TW" altLang="en-US" sz="3200" dirty="0">
-                <a:effectLst>
-                  <a:outerShdw blurRad="38100" dist="38100" dir="2700000" algn="tl">
-                    <a:srgbClr val="000000">
-                      <a:alpha val="43137"/>
-                    </a:srgbClr>
-                  </a:outerShdw>
-                </a:effectLst>
-                <a:latin typeface="微軟正黑體" panose="020B0604030504040204" pitchFamily="34" charset="-120"/>
-                <a:ea typeface="微軟正黑體" panose="020B0604030504040204" pitchFamily="34" charset="-120"/>
-                <a:cs typeface="Heiti TC Light"/>
-              </a:rPr>
-              <a:t>？</a:t>
-            </a:r>
-            <a:endParaRPr kumimoji="1" lang="en-US" altLang="zh-TW" sz="3200" dirty="0">
-              <a:effectLst>
-                <a:outerShdw blurRad="38100" dist="38100" dir="2700000" algn="tl">
-                  <a:srgbClr val="000000">
-                    <a:alpha val="43137"/>
-                  </a:srgbClr>
-                </a:outerShdw>
-              </a:effectLst>
-              <a:latin typeface="微軟正黑體" panose="020B0604030504040204" pitchFamily="34" charset="-120"/>
-              <a:ea typeface="微軟正黑體" panose="020B0604030504040204" pitchFamily="34" charset="-120"/>
-              <a:cs typeface="Heiti TC Light"/>
-            </a:endParaRPr>
-          </a:p>
-          <a:p>
-            <a:pPr marL="361950" indent="-361950">
-              <a:buFont typeface="Arial" panose="020B0604020202020204" pitchFamily="34" charset="0"/>
-              <a:buChar char="•"/>
-            </a:pPr>
-            <a:r>
-              <a:rPr kumimoji="1" lang="zh-TW" altLang="en-US" sz="3200" dirty="0">
-                <a:effectLst>
-                  <a:outerShdw blurRad="38100" dist="38100" dir="2700000" algn="tl">
-                    <a:srgbClr val="000000">
-                      <a:alpha val="43137"/>
-                    </a:srgbClr>
-                  </a:outerShdw>
-                </a:effectLst>
-                <a:latin typeface="微軟正黑體" panose="020B0604030504040204" pitchFamily="34" charset="-120"/>
-                <a:ea typeface="微軟正黑體" panose="020B0604030504040204" pitchFamily="34" charset="-120"/>
-                <a:cs typeface="Heiti TC Light"/>
-              </a:rPr>
-              <a:t>使用</a:t>
-            </a:r>
-            <a:r>
-              <a:rPr kumimoji="1" lang="en-US" altLang="zh-TW" sz="3200" dirty="0">
-                <a:effectLst>
-                  <a:outerShdw blurRad="38100" dist="38100" dir="2700000" algn="tl">
-                    <a:srgbClr val="000000">
-                      <a:alpha val="43137"/>
-                    </a:srgbClr>
-                  </a:outerShdw>
-                </a:effectLst>
-                <a:latin typeface="微軟正黑體" panose="020B0604030504040204" pitchFamily="34" charset="-120"/>
-                <a:ea typeface="微軟正黑體" panose="020B0604030504040204" pitchFamily="34" charset="-120"/>
-                <a:cs typeface="Heiti TC Light"/>
-              </a:rPr>
-              <a:t>RLHF</a:t>
-            </a:r>
-            <a:r>
-              <a:rPr kumimoji="1" lang="zh-TW" altLang="en-US" sz="3200" dirty="0">
-                <a:effectLst>
-                  <a:outerShdw blurRad="38100" dist="38100" dir="2700000" algn="tl">
-                    <a:srgbClr val="000000">
-                      <a:alpha val="43137"/>
-                    </a:srgbClr>
-                  </a:outerShdw>
-                </a:effectLst>
-                <a:latin typeface="微軟正黑體" panose="020B0604030504040204" pitchFamily="34" charset="-120"/>
-                <a:ea typeface="微軟正黑體" panose="020B0604030504040204" pitchFamily="34" charset="-120"/>
-                <a:cs typeface="Heiti TC Light"/>
-              </a:rPr>
-              <a:t>的作法</a:t>
-            </a:r>
-            <a:endParaRPr kumimoji="1" lang="en-US" altLang="zh-TW" sz="3200" dirty="0">
-              <a:effectLst>
-                <a:outerShdw blurRad="38100" dist="38100" dir="2700000" algn="tl">
-                  <a:srgbClr val="000000">
-                    <a:alpha val="43137"/>
-                  </a:srgbClr>
-                </a:outerShdw>
-              </a:effectLst>
-              <a:latin typeface="微軟正黑體" panose="020B0604030504040204" pitchFamily="34" charset="-120"/>
-              <a:ea typeface="微軟正黑體" panose="020B0604030504040204" pitchFamily="34" charset="-120"/>
-              <a:cs typeface="Heiti TC Light"/>
-            </a:endParaRPr>
-          </a:p>
-          <a:p>
-            <a:pPr marL="361950" indent="-361950">
-              <a:buFont typeface="Arial" panose="020B0604020202020204" pitchFamily="34" charset="0"/>
-              <a:buChar char="•"/>
-            </a:pPr>
-            <a:r>
-              <a:rPr kumimoji="1" lang="en-US" altLang="zh-TW" sz="3200" dirty="0">
-                <a:effectLst>
-                  <a:outerShdw blurRad="38100" dist="38100" dir="2700000" algn="tl">
-                    <a:srgbClr val="000000">
-                      <a:alpha val="43137"/>
-                    </a:srgbClr>
-                  </a:outerShdw>
-                </a:effectLst>
-                <a:latin typeface="微軟正黑體" panose="020B0604030504040204" pitchFamily="34" charset="-120"/>
-                <a:ea typeface="微軟正黑體" panose="020B0604030504040204" pitchFamily="34" charset="-120"/>
-                <a:cs typeface="Heiti TC Light"/>
-              </a:rPr>
-              <a:t>RLHF</a:t>
-            </a:r>
-            <a:r>
-              <a:rPr kumimoji="1" lang="zh-TW" altLang="en-US" sz="3200" dirty="0">
-                <a:effectLst>
-                  <a:outerShdw blurRad="38100" dist="38100" dir="2700000" algn="tl">
-                    <a:srgbClr val="000000">
-                      <a:alpha val="43137"/>
-                    </a:srgbClr>
-                  </a:outerShdw>
-                </a:effectLst>
-                <a:latin typeface="微軟正黑體" panose="020B0604030504040204" pitchFamily="34" charset="-120"/>
-                <a:ea typeface="微軟正黑體" panose="020B0604030504040204" pitchFamily="34" charset="-120"/>
-                <a:cs typeface="Heiti TC Light"/>
-              </a:rPr>
-              <a:t>的其它細節</a:t>
-            </a:r>
-          </a:p>
-          <a:p>
-            <a:pPr marL="361950" indent="-361950">
-              <a:buFont typeface="Arial" panose="020B0604020202020204" pitchFamily="34" charset="0"/>
-              <a:buChar char="•"/>
-            </a:pPr>
-            <a:r>
-              <a:rPr kumimoji="1" lang="zh-TW" altLang="en-US" sz="3200" dirty="0">
-                <a:effectLst>
-                  <a:outerShdw blurRad="38100" dist="38100" dir="2700000" algn="tl">
-                    <a:srgbClr val="000000">
-                      <a:alpha val="43137"/>
-                    </a:srgbClr>
-                  </a:outerShdw>
-                </a:effectLst>
-                <a:latin typeface="微軟正黑體" panose="020B0604030504040204" pitchFamily="34" charset="-120"/>
-                <a:ea typeface="微軟正黑體" panose="020B0604030504040204" pitchFamily="34" charset="-120"/>
-                <a:cs typeface="Heiti TC Light"/>
-              </a:rPr>
-              <a:t>大型語言模的進化</a:t>
-            </a:r>
-            <a:endParaRPr kumimoji="1" lang="en-US" altLang="zh-TW" sz="3200" dirty="0">
-              <a:effectLst>
-                <a:outerShdw blurRad="38100" dist="38100" dir="2700000" algn="tl">
-                  <a:srgbClr val="000000">
-                    <a:alpha val="43137"/>
-                  </a:srgbClr>
-                </a:outerShdw>
-              </a:effectLst>
-              <a:latin typeface="微軟正黑體" panose="020B0604030504040204" pitchFamily="34" charset="-120"/>
-              <a:ea typeface="微軟正黑體" panose="020B0604030504040204" pitchFamily="34" charset="-120"/>
-              <a:cs typeface="Heiti TC Light"/>
-            </a:endParaRPr>
-          </a:p>
-          <a:p>
-            <a:pPr marL="361950" indent="-361950">
-              <a:buFont typeface="Arial" panose="020B0604020202020204" pitchFamily="34" charset="0"/>
-              <a:buChar char="•"/>
-            </a:pPr>
-            <a:r>
-              <a:rPr kumimoji="1" lang="zh-TW" altLang="en-US" sz="3200" dirty="0">
-                <a:effectLst>
-                  <a:outerShdw blurRad="38100" dist="38100" dir="2700000" algn="tl">
-                    <a:srgbClr val="000000">
-                      <a:alpha val="43137"/>
-                    </a:srgbClr>
-                  </a:outerShdw>
-                </a:effectLst>
-                <a:latin typeface="微軟正黑體" panose="020B0604030504040204" pitchFamily="34" charset="-120"/>
-                <a:ea typeface="微軟正黑體" panose="020B0604030504040204" pitchFamily="34" charset="-120"/>
-                <a:cs typeface="Heiti TC Light"/>
-              </a:rPr>
-              <a:t>從結果找指令</a:t>
+              <a:t>介紹</a:t>
             </a:r>
           </a:p>
         </p:txBody>
@@ -14764,7 +14679,7 @@
         </p:nvSpPr>
         <p:spPr>
           <a:xfrm>
-            <a:off x="1638300" y="304800"/>
+            <a:off x="1638300" y="659264"/>
             <a:ext cx="5867400" cy="990600"/>
           </a:xfrm>
           <a:prstGeom prst="rect">
@@ -14795,7 +14710,7 @@
               <a:defRPr/>
             </a:pPr>
             <a:r>
-              <a:rPr kumimoji="0" lang="en-US" altLang="zh-TW" sz="4800" b="1" i="0" u="none" strike="noStrike" kern="0" cap="none" spc="0" normalizeH="0" baseline="0" noProof="0" dirty="0">
+              <a:rPr kumimoji="0" lang="en-US" altLang="zh-TW" sz="4800" b="1" i="0" u="none" strike="noStrike" kern="0" cap="none" spc="0" normalizeH="0" baseline="0" noProof="0">
                 <a:ln>
                   <a:noFill/>
                 </a:ln>
@@ -14816,281 +14731,6 @@
                 <a:cs typeface="+mn-cs"/>
               </a:rPr>
               <a:t>16. </a:t>
-            </a:r>
-            <a:r>
-              <a:rPr kumimoji="0" lang="zh-TW" altLang="en-US" sz="4800" b="1" i="0" u="none" strike="noStrike" kern="0" cap="none" spc="0" normalizeH="0" baseline="0" noProof="0" dirty="0">
-                <a:ln>
-                  <a:noFill/>
-                </a:ln>
-                <a:solidFill>
-                  <a:srgbClr val="00B0F0"/>
-                </a:solidFill>
-                <a:effectLst>
-                  <a:outerShdw blurRad="38100" dist="38100" dir="2700000" algn="tl">
-                    <a:srgbClr val="000000">
-                      <a:alpha val="43137"/>
-                    </a:srgbClr>
-                  </a:outerShdw>
-                </a:effectLst>
-                <a:uLnTx/>
-                <a:uFillTx/>
-                <a:latin typeface="微軟正黑體" panose="020B0604030504040204" pitchFamily="34" charset="-120"/>
-                <a:ea typeface="微軟正黑體" panose="020B0604030504040204" pitchFamily="34" charset="-120"/>
-                <a:cs typeface="+mn-cs"/>
-              </a:rPr>
-              <a:t>進入</a:t>
-            </a:r>
-            <a:r>
-              <a:rPr kumimoji="0" lang="en-US" altLang="zh-TW" sz="4800" b="1" i="0" u="none" strike="noStrike" kern="0" cap="none" spc="0" normalizeH="0" baseline="0" noProof="0" dirty="0">
-                <a:ln>
-                  <a:noFill/>
-                </a:ln>
-                <a:solidFill>
-                  <a:srgbClr val="00B0F0"/>
-                </a:solidFill>
-                <a:effectLst>
-                  <a:outerShdw blurRad="38100" dist="38100" dir="2700000" algn="tl">
-                    <a:srgbClr val="000000">
-                      <a:alpha val="43137"/>
-                    </a:srgbClr>
-                  </a:outerShdw>
-                </a:effectLst>
-                <a:uLnTx/>
-                <a:uFillTx/>
-                <a:latin typeface="微軟正黑體" panose="020B0604030504040204" pitchFamily="34" charset="-120"/>
-                <a:ea typeface="微軟正黑體" panose="020B0604030504040204" pitchFamily="34" charset="-120"/>
-                <a:cs typeface="+mn-cs"/>
-              </a:rPr>
-              <a:t>RLHF</a:t>
-            </a:r>
-            <a:r>
-              <a:rPr kumimoji="0" lang="zh-TW" altLang="en-US" sz="4800" b="1" i="0" u="none" strike="noStrike" kern="0" cap="none" spc="0" normalizeH="0" baseline="0" noProof="0" dirty="0">
-                <a:ln>
-                  <a:noFill/>
-                </a:ln>
-                <a:solidFill>
-                  <a:srgbClr val="00B0F0"/>
-                </a:solidFill>
-                <a:effectLst>
-                  <a:outerShdw blurRad="38100" dist="38100" dir="2700000" algn="tl">
-                    <a:srgbClr val="000000">
-                      <a:alpha val="43137"/>
-                    </a:srgbClr>
-                  </a:outerShdw>
-                </a:effectLst>
-                <a:uLnTx/>
-                <a:uFillTx/>
-                <a:latin typeface="微軟正黑體" panose="020B0604030504040204" pitchFamily="34" charset="-120"/>
-                <a:ea typeface="微軟正黑體" panose="020B0604030504040204" pitchFamily="34" charset="-120"/>
-                <a:cs typeface="+mn-cs"/>
-              </a:rPr>
-              <a:t>階段</a:t>
-            </a:r>
-          </a:p>
-        </p:txBody>
-      </p:sp>
-    </p:spTree>
-    <p:extLst>
-      <p:ext uri="{BB962C8B-B14F-4D97-AF65-F5344CB8AC3E}">
-        <p14:creationId xmlns:p14="http://schemas.microsoft.com/office/powerpoint/2010/main" val="1661374500"/>
-      </p:ext>
-    </p:extLst>
-  </p:cSld>
-  <p:clrMapOvr>
-    <a:masterClrMapping/>
-  </p:clrMapOvr>
-  <p:transition>
-    <p:fade/>
-  </p:transition>
-</p:sld>
-</file>
-
-<file path=ppt/slides/slide21.xml><?xml version="1.0" encoding="utf-8"?>
-<p:sld xmlns:a="http://schemas.openxmlformats.org/drawingml/2006/main" xmlns:r="http://schemas.openxmlformats.org/officeDocument/2006/relationships" xmlns:p="http://schemas.openxmlformats.org/presentationml/2006/main">
-  <p:cSld>
-    <p:spTree>
-      <p:nvGrpSpPr>
-        <p:cNvPr id="1" name=""/>
-        <p:cNvGrpSpPr/>
-        <p:nvPr/>
-      </p:nvGrpSpPr>
-      <p:grpSpPr>
-        <a:xfrm>
-          <a:off x="0" y="0"/>
-          <a:ext cx="0" cy="0"/>
-          <a:chOff x="0" y="0"/>
-          <a:chExt cx="0" cy="0"/>
-        </a:xfrm>
-      </p:grpSpPr>
-      <p:sp>
-        <p:nvSpPr>
-          <p:cNvPr id="5" name="文字方塊 4"/>
-          <p:cNvSpPr txBox="1"/>
-          <p:nvPr/>
-        </p:nvSpPr>
-        <p:spPr>
-          <a:xfrm>
-            <a:off x="685800" y="1676400"/>
-            <a:ext cx="8077200" cy="1077218"/>
-          </a:xfrm>
-          <a:prstGeom prst="rect">
-            <a:avLst/>
-          </a:prstGeom>
-          <a:noFill/>
-        </p:spPr>
-        <p:txBody>
-          <a:bodyPr wrap="square" rtlCol="0">
-            <a:spAutoFit/>
-          </a:bodyPr>
-          <a:lstStyle/>
-          <a:p>
-            <a:pPr marL="361950" indent="-361950">
-              <a:buFont typeface="Arial" panose="020B0604020202020204" pitchFamily="34" charset="0"/>
-              <a:buChar char="•"/>
-            </a:pPr>
-            <a:r>
-              <a:rPr kumimoji="1" lang="en-US" altLang="zh-TW" sz="3200" dirty="0">
-                <a:effectLst>
-                  <a:outerShdw blurRad="38100" dist="38100" dir="2700000" algn="tl">
-                    <a:srgbClr val="000000">
-                      <a:alpha val="43137"/>
-                    </a:srgbClr>
-                  </a:outerShdw>
-                </a:effectLst>
-                <a:latin typeface="微軟正黑體" panose="020B0604030504040204" pitchFamily="34" charset="-120"/>
-                <a:ea typeface="微軟正黑體" panose="020B0604030504040204" pitchFamily="34" charset="-120"/>
-                <a:cs typeface="Heiti TC Light"/>
-              </a:rPr>
-              <a:t>RLHF</a:t>
-            </a:r>
-            <a:r>
-              <a:rPr kumimoji="1" lang="zh-TW" altLang="en-US" sz="3200" dirty="0">
-                <a:effectLst>
-                  <a:outerShdw blurRad="38100" dist="38100" dir="2700000" algn="tl">
-                    <a:srgbClr val="000000">
-                      <a:alpha val="43137"/>
-                    </a:srgbClr>
-                  </a:outerShdw>
-                </a:effectLst>
-                <a:latin typeface="微軟正黑體" panose="020B0604030504040204" pitchFamily="34" charset="-120"/>
-                <a:ea typeface="微軟正黑體" panose="020B0604030504040204" pitchFamily="34" charset="-120"/>
-                <a:cs typeface="Heiti TC Light"/>
-              </a:rPr>
-              <a:t>的問題</a:t>
-            </a:r>
-            <a:endParaRPr kumimoji="1" lang="en-US" altLang="zh-TW" sz="3200" dirty="0">
-              <a:effectLst>
-                <a:outerShdw blurRad="38100" dist="38100" dir="2700000" algn="tl">
-                  <a:srgbClr val="000000">
-                    <a:alpha val="43137"/>
-                  </a:srgbClr>
-                </a:outerShdw>
-              </a:effectLst>
-              <a:latin typeface="微軟正黑體" panose="020B0604030504040204" pitchFamily="34" charset="-120"/>
-              <a:ea typeface="微軟正黑體" panose="020B0604030504040204" pitchFamily="34" charset="-120"/>
-              <a:cs typeface="Heiti TC Light"/>
-            </a:endParaRPr>
-          </a:p>
-          <a:p>
-            <a:pPr marL="361950" indent="-361950">
-              <a:buFont typeface="Arial" panose="020B0604020202020204" pitchFamily="34" charset="0"/>
-              <a:buChar char="•"/>
-            </a:pPr>
-            <a:r>
-              <a:rPr kumimoji="1" lang="en-US" altLang="zh-TW" sz="3200" dirty="0">
-                <a:effectLst>
-                  <a:outerShdw blurRad="38100" dist="38100" dir="2700000" algn="tl">
-                    <a:srgbClr val="000000">
-                      <a:alpha val="43137"/>
-                    </a:srgbClr>
-                  </a:outerShdw>
-                </a:effectLst>
-                <a:latin typeface="微軟正黑體" panose="020B0604030504040204" pitchFamily="34" charset="-120"/>
-                <a:ea typeface="微軟正黑體" panose="020B0604030504040204" pitchFamily="34" charset="-120"/>
-                <a:cs typeface="Heiti TC Light"/>
-              </a:rPr>
-              <a:t>DPO</a:t>
-            </a:r>
-            <a:r>
-              <a:rPr kumimoji="1" lang="zh-TW" altLang="en-US" sz="3200" dirty="0">
-                <a:effectLst>
-                  <a:outerShdw blurRad="38100" dist="38100" dir="2700000" algn="tl">
-                    <a:srgbClr val="000000">
-                      <a:alpha val="43137"/>
-                    </a:srgbClr>
-                  </a:outerShdw>
-                </a:effectLst>
-                <a:latin typeface="微軟正黑體" panose="020B0604030504040204" pitchFamily="34" charset="-120"/>
-                <a:ea typeface="微軟正黑體" panose="020B0604030504040204" pitchFamily="34" charset="-120"/>
-                <a:cs typeface="Heiti TC Light"/>
-              </a:rPr>
-              <a:t>介紹</a:t>
-            </a:r>
-          </a:p>
-        </p:txBody>
-      </p:sp>
-      <p:sp>
-        <p:nvSpPr>
-          <p:cNvPr id="4" name="文字版面配置區 2"/>
-          <p:cNvSpPr txBox="1">
-            <a:spLocks/>
-          </p:cNvSpPr>
-          <p:nvPr/>
-        </p:nvSpPr>
-        <p:spPr>
-          <a:xfrm>
-            <a:off x="1638300" y="659264"/>
-            <a:ext cx="5867400" cy="990600"/>
-          </a:xfrm>
-          <a:prstGeom prst="rect">
-            <a:avLst/>
-          </a:prstGeom>
-        </p:spPr>
-        <p:txBody>
-          <a:bodyPr tIns="91440" bIns="91440" anchor="b" anchorCtr="0">
-            <a:noAutofit/>
-          </a:bodyPr>
-          <a:lstStyle/>
-          <a:p>
-            <a:pPr marL="0" marR="0" lvl="0" indent="0" algn="just" defTabSz="914400" rtl="0" eaLnBrk="1" fontAlgn="auto" latinLnBrk="0" hangingPunct="1">
-              <a:lnSpc>
-                <a:spcPct val="100000"/>
-              </a:lnSpc>
-              <a:spcBef>
-                <a:spcPct val="20000"/>
-              </a:spcBef>
-              <a:spcAft>
-                <a:spcPts val="0"/>
-              </a:spcAft>
-              <a:buClrTx/>
-              <a:buSzTx/>
-              <a:buFontTx/>
-              <a:buNone/>
-              <a:tabLst/>
-              <a:defRPr/>
-            </a:pPr>
-            <a:r>
-              <a:rPr kumimoji="0" lang="en-US" altLang="zh-TW" sz="4800" b="1" i="0" u="none" strike="noStrike" kern="0" cap="none" spc="0" normalizeH="0" baseline="0" noProof="0" dirty="0">
-                <a:ln>
-                  <a:noFill/>
-                </a:ln>
-                <a:solidFill>
-                  <a:srgbClr val="00B0F0"/>
-                </a:solidFill>
-                <a:effectLst>
-                  <a:outerShdw blurRad="38100" dist="38100" dir="2700000" algn="tl">
-                    <a:srgbClr val="000000">
-                      <a:alpha val="43137"/>
-                    </a:srgbClr>
-                  </a:outerShdw>
-                </a:effectLst>
-                <a:uLnTx/>
-                <a:uFillTx/>
-                <a:latin typeface="微軟正黑體" panose="020B0604030504040204" pitchFamily="34" charset="-120"/>
-                <a:ea typeface="微軟正黑體" panose="020B0604030504040204" pitchFamily="34" charset="-120"/>
-                <a:cs typeface="+mn-cs"/>
-              </a:rPr>
-              <a:t>17. </a:t>
             </a:r>
             <a:r>
               <a:rPr kumimoji="0" lang="zh-TW" altLang="en-US" sz="4800" b="1" i="0" u="none" strike="noStrike" kern="0" cap="none" spc="0" normalizeH="0" baseline="0" noProof="0" dirty="0">
